--- a/submission/VeriFact_Deck.pptx
+++ b/submission/VeriFact_Deck.pptx
@@ -3110,8 +3110,8 @@
         </p:nvSpPr>
         <p:spPr>
           <a:xfrm>
-            <a:off x="1097280" y="1463040"/>
-            <a:ext cx="10058400" cy="2926080"/>
+            <a:off x="1097280" y="1371600"/>
+            <a:ext cx="10058400" cy="3108960"/>
           </a:xfrm>
           <a:prstGeom prst="rect">
             <a:avLst/>
@@ -3135,7 +3135,7 @@
               </a:defRPr>
             </a:pPr>
             <a:r>
-              <a:t>🛡️  VERIFACT</a:t>
+              <a:t>⚖️  VERITASAI</a:t>
             </a:r>
           </a:p>
           <a:p>
@@ -3150,7 +3150,7 @@
               </a:defRPr>
             </a:pPr>
             <a:r>
-              <a:t>Autonomous Multi-Agent Research &amp; Fact-Verification System</a:t>
+              <a:t>The Research Court — Autonomous Multi-Agent Fact-Verification</a:t>
             </a:r>
           </a:p>
           <a:p>
@@ -3165,7 +3165,7 @@
               </a:defRPr>
             </a:pPr>
             <a:r>
-              <a:t>Every claim argued over by three independent AI agents — with citations and a confidence score you can trust.</a:t>
+              <a:t>Every claim argued over by three adversarial agents, grounded in exact source quotes, and anchored to a Merkle tree you can verify in your browser.</a:t>
             </a:r>
           </a:p>
         </p:txBody>
@@ -3218,7 +3218,7 @@
               </a:defRPr>
             </a:pPr>
             <a:r>
-              <a:t>Team submission — Round 1</a:t>
+              <a:t>Phase 0-1 of the 18-month master plan</a:t>
             </a:r>
           </a:p>
         </p:txBody>
@@ -3351,7 +3351,7 @@
               </a:defRPr>
             </a:pPr>
             <a:r>
-              <a:t>• Single-model answers give no receipts: no sources, no dissent, no way to know what was verified.</a:t>
+              <a:t>• Single-model answers give no receipts: no sources, no dissent, no way to know what was verified — citations link URLs, not evidence.</a:t>
             </a:r>
           </a:p>
           <a:p>
@@ -3396,7 +3396,7 @@
               </a:defRPr>
             </a:pPr>
             <a:r>
-              <a:t>VeriFact's answer: an adversarial panel, not a single voice.</a:t>
+              <a:t>VeritasAI's answer: a self-adversarial court, not a single voice — and every receipt is math.</a:t>
             </a:r>
           </a:p>
         </p:txBody>
@@ -3475,7 +3475,7 @@
               </a:defRPr>
             </a:pPr>
             <a:r>
-              <a:t>A 7-agent pipeline with an adversarial core</a:t>
+              <a:t>The Research Court — a 10-stage pipeline</a:t>
             </a:r>
           </a:p>
         </p:txBody>
@@ -3532,7 +3532,7 @@
               </a:defRPr>
             </a:pPr>
             <a:r>
-              <a:t>1 · PLANNER</a:t>
+              <a:t>1-2 · MURLI</a:t>
             </a:r>
           </a:p>
           <a:p>
@@ -3547,7 +3547,7 @@
               </a:defRPr>
             </a:pPr>
             <a:r>
-              <a:t>topic → subtopics +</a:t>
+              <a:t>3 hypotheses +</a:t>
             </a:r>
           </a:p>
           <a:p>
@@ -3562,7 +3562,22 @@
               </a:defRPr>
             </a:pPr>
             <a:r>
-              <a:t>8 diverse search queries</a:t>
+              <a:t>self-challenge →</a:t>
+            </a:r>
+          </a:p>
+          <a:p>
+            <a:pPr algn="ctr">
+              <a:spcAft>
+                <a:spcPts val="600"/>
+              </a:spcAft>
+              <a:defRPr sz="1100">
+                <a:solidFill>
+                  <a:srgbClr val="8B96AD"/>
+                </a:solidFill>
+              </a:defRPr>
+            </a:pPr>
+            <a:r>
+              <a:t>counter-searches</a:t>
             </a:r>
           </a:p>
         </p:txBody>
@@ -3657,7 +3672,7 @@
               </a:defRPr>
             </a:pPr>
             <a:r>
-              <a:t>2 · RESEARCHER</a:t>
+              <a:t>3 · EVIDENCE</a:t>
             </a:r>
           </a:p>
           <a:p>
@@ -3672,7 +3687,7 @@
               </a:defRPr>
             </a:pPr>
             <a:r>
-              <a:t>Tavily web search →</a:t>
+              <a:t>Serper web+scholar</a:t>
             </a:r>
           </a:p>
           <a:p>
@@ -3687,7 +3702,22 @@
               </a:defRPr>
             </a:pPr>
             <a:r>
-              <a:t>12 deduped sources</a:t>
+              <a:t>+news → Tavily</a:t>
+            </a:r>
+          </a:p>
+          <a:p>
+            <a:pPr algn="ctr">
+              <a:spcAft>
+                <a:spcPts val="600"/>
+              </a:spcAft>
+              <a:defRPr sz="1100">
+                <a:solidFill>
+                  <a:srgbClr val="8B96AD"/>
+                </a:solidFill>
+              </a:defRPr>
+            </a:pPr>
+            <a:r>
+              <a:t>full-text, hashed</a:t>
             </a:r>
           </a:p>
         </p:txBody>
@@ -3782,7 +3812,7 @@
               </a:defRPr>
             </a:pPr>
             <a:r>
-              <a:t>3 · EXTRACTOR</a:t>
+              <a:t>4 · CLAIMS</a:t>
             </a:r>
           </a:p>
           <a:p>
@@ -3797,7 +3827,7 @@
               </a:defRPr>
             </a:pPr>
             <a:r>
-              <a:t>atomic claim</a:t>
+              <a:t>atomic claims</a:t>
             </a:r>
           </a:p>
           <a:p>
@@ -3812,7 +3842,22 @@
               </a:defRPr>
             </a:pPr>
             <a:r>
-              <a:t>decomposition</a:t>
+              <a:t>anchored to</a:t>
+            </a:r>
+          </a:p>
+          <a:p>
+            <a:pPr algn="ctr">
+              <a:spcAft>
+                <a:spcPts val="600"/>
+              </a:spcAft>
+              <a:defRPr sz="1100">
+                <a:solidFill>
+                  <a:srgbClr val="8B96AD"/>
+                </a:solidFill>
+              </a:defRPr>
+            </a:pPr>
+            <a:r>
+              <a:t>evidence chunks</a:t>
             </a:r>
           </a:p>
         </p:txBody>
@@ -3907,7 +3952,7 @@
               </a:defRPr>
             </a:pPr>
             <a:r>
-              <a:t>4 · VERIFIERS ×3</a:t>
+              <a:t>5 · COURT ×3</a:t>
             </a:r>
           </a:p>
           <a:p>
@@ -3922,7 +3967,7 @@
               </a:defRPr>
             </a:pPr>
             <a:r>
-              <a:t>adversarial panel,</a:t>
+              <a:t>span-gated quotes,</a:t>
             </a:r>
           </a:p>
           <a:p>
@@ -3937,7 +3982,22 @@
               </a:defRPr>
             </a:pPr>
             <a:r>
-              <a:t>parallel, majority vote</a:t>
+              <a:t>HMAC-signed</a:t>
+            </a:r>
+          </a:p>
+          <a:p>
+            <a:pPr algn="ctr">
+              <a:spcAft>
+                <a:spcPts val="600"/>
+              </a:spcAft>
+              <a:defRPr sz="1100">
+                <a:solidFill>
+                  <a:srgbClr val="8B96AD"/>
+                </a:solidFill>
+              </a:defRPr>
+            </a:pPr>
+            <a:r>
+              <a:t>verdicts</a:t>
             </a:r>
           </a:p>
         </p:txBody>
@@ -4032,7 +4092,7 @@
               </a:defRPr>
             </a:pPr>
             <a:r>
-              <a:t>5 · CONTRADICTION</a:t>
+              <a:t>6-7 · SWEEPS</a:t>
             </a:r>
           </a:p>
           <a:p>
@@ -4047,7 +4107,7 @@
               </a:defRPr>
             </a:pPr>
             <a:r>
-              <a:t>disagreements &amp;</a:t>
+              <a:t>typed hallucination</a:t>
             </a:r>
           </a:p>
           <a:p>
@@ -4062,7 +4122,22 @@
               </a:defRPr>
             </a:pPr>
             <a:r>
-              <a:t>refutations surfaced</a:t>
+              <a:t>+ contradiction</a:t>
+            </a:r>
+          </a:p>
+          <a:p>
+            <a:pPr algn="ctr">
+              <a:spcAft>
+                <a:spcPts val="600"/>
+              </a:spcAft>
+              <a:defRPr sz="1100">
+                <a:solidFill>
+                  <a:srgbClr val="8B96AD"/>
+                </a:solidFill>
+              </a:defRPr>
+            </a:pPr>
+            <a:r>
+              <a:t>detection</a:t>
             </a:r>
           </a:p>
         </p:txBody>
@@ -4157,7 +4232,7 @@
               </a:defRPr>
             </a:pPr>
             <a:r>
-              <a:t>6 · WRITER</a:t>
+              <a:t>8-10 · VERDICT</a:t>
             </a:r>
           </a:p>
           <a:p>
@@ -4172,7 +4247,7 @@
               </a:defRPr>
             </a:pPr>
             <a:r>
-              <a:t>citation-backed report</a:t>
+              <a:t>trust engine,</a:t>
             </a:r>
           </a:p>
           <a:p>
@@ -4187,7 +4262,22 @@
               </a:defRPr>
             </a:pPr>
             <a:r>
-              <a:t>+ trust score</a:t>
+              <a:t>Merkle root,</a:t>
+            </a:r>
+          </a:p>
+          <a:p>
+            <a:pPr algn="ctr">
+              <a:spcAft>
+                <a:spcPts val="600"/>
+              </a:spcAft>
+              <a:defRPr sz="1100">
+                <a:solidFill>
+                  <a:srgbClr val="8B96AD"/>
+                </a:solidFill>
+              </a:defRPr>
+            </a:pPr>
+            <a:r>
+              <a:t>SQLite journal</a:t>
             </a:r>
           </a:p>
         </p:txBody>
@@ -4226,7 +4316,7 @@
               </a:defRPr>
             </a:pPr>
             <a:r>
-              <a:t>• Live pipeline: every stage streams to the browser over Server-Sent Events — verdict badges flip per claim in real time.</a:t>
+              <a:t>• Live pipeline: every stage streams to the browser over Server-Sent Events — hypotheses form, verdict badges flip, fabricated quotes get voided in real time.</a:t>
             </a:r>
           </a:p>
           <a:p>
@@ -4241,7 +4331,7 @@
               </a:defRPr>
             </a:pPr>
             <a:r>
-              <a:t>• Research-grounded: Stanford STORM (multi-perspective research), DebateCV SIGIR 2025 (debate-driven verification), FActScore (atomic claims).</a:t>
+              <a:t>• Research-grounded: STORM (multi-perspective research), DebateCV SIGIR 2025 (debate-driven verification), FActScore (atomic claims), MBFC (source tiers).</a:t>
             </a:r>
           </a:p>
           <a:p>
@@ -4256,7 +4346,7 @@
               </a:defRPr>
             </a:pPr>
             <a:r>
-              <a:t>• Resilient: per-agent failure tolerance, JSON nudge-retry, graceful degradation.</a:t>
+              <a:t>• Resilient: per-agent failure tolerance, JSON nudge-retry, graceful degradation to snippet-only mode if extraction fails.</a:t>
             </a:r>
           </a:p>
         </p:txBody>
@@ -4320,7 +4410,7 @@
               </a:defRPr>
             </a:pPr>
             <a:r>
-              <a:t>THE DIFFERENTIATOR</a:t>
+              <a:t>THE CORE INNOVATION</a:t>
             </a:r>
           </a:p>
           <a:p>
@@ -4335,7 +4425,7 @@
               </a:defRPr>
             </a:pPr>
             <a:r>
-              <a:t>Three verifiers. Three lenses. Majority vote.</a:t>
+              <a:t>Murli attacks its own findings first</a:t>
             </a:r>
           </a:p>
         </p:txBody>
@@ -4349,7 +4439,7 @@
         <p:spPr>
           <a:xfrm>
             <a:off x="548640" y="1737360"/>
-            <a:ext cx="3566160" cy="2377440"/>
+            <a:ext cx="5486400" cy="4206240"/>
           </a:xfrm>
           <a:prstGeom prst="rect">
             <a:avLst/>
@@ -4387,12 +4477,12 @@
               </a:spcAft>
               <a:defRPr sz="1500" b="1">
                 <a:solidFill>
-                  <a:srgbClr val="2ECC8F"/>
-                </a:solidFill>
-              </a:defRPr>
-            </a:pPr>
-            <a:r>
-              <a:t>A · EVIDENTIALIST</a:t>
+                  <a:srgbClr val="4F8CFF"/>
+                </a:solidFill>
+              </a:defRPr>
+            </a:pPr>
+            <a:r>
+              <a:t>SELF-ADVERSARIAL REASONING</a:t>
             </a:r>
           </a:p>
           <a:p>
@@ -4407,7 +4497,7 @@
               </a:defRPr>
             </a:pPr>
             <a:r>
-              <a:t>“What do the sources literally say?”</a:t>
+              <a:t>Standard agents “yes-sir” the prompt.</a:t>
             </a:r>
           </a:p>
           <a:p>
@@ -4422,7 +4512,7 @@
               </a:defRPr>
             </a:pPr>
             <a:r>
-              <a:t>Supports a claim ONLY if a source</a:t>
+              <a:t>Murli generates 3 competing hypotheses,</a:t>
             </a:r>
           </a:p>
           <a:p>
@@ -4437,7 +4527,121 @@
               </a:defRPr>
             </a:pPr>
             <a:r>
-              <a:t>explicitly states it. Never infers.</a:t>
+              <a:t>then for each asks:</a:t>
+            </a:r>
+          </a:p>
+          <a:p>
+            <a:pPr>
+              <a:spcAft>
+                <a:spcPts val="600"/>
+              </a:spcAft>
+              <a:defRPr sz="1250">
+                <a:solidFill>
+                  <a:srgbClr val="8B96AD"/>
+                </a:solidFill>
+              </a:defRPr>
+            </a:pPr>
+          </a:p>
+          <a:p>
+            <a:pPr>
+              <a:spcAft>
+                <a:spcPts val="600"/>
+              </a:spcAft>
+              <a:defRPr sz="1250">
+                <a:solidFill>
+                  <a:srgbClr val="8B96AD"/>
+                </a:solidFill>
+              </a:defRPr>
+            </a:pPr>
+            <a:r>
+              <a:t>  “If this is WRONG, why would it be</a:t>
+            </a:r>
+          </a:p>
+          <a:p>
+            <a:pPr>
+              <a:spcAft>
+                <a:spcPts val="600"/>
+              </a:spcAft>
+              <a:defRPr sz="1250">
+                <a:solidFill>
+                  <a:srgbClr val="8B96AD"/>
+                </a:solidFill>
+              </a:defRPr>
+            </a:pPr>
+            <a:r>
+              <a:t>   wrong? What evidence would DISPROVE</a:t>
+            </a:r>
+          </a:p>
+          <a:p>
+            <a:pPr>
+              <a:spcAft>
+                <a:spcPts val="600"/>
+              </a:spcAft>
+              <a:defRPr sz="1250">
+                <a:solidFill>
+                  <a:srgbClr val="8B96AD"/>
+                </a:solidFill>
+              </a:defRPr>
+            </a:pPr>
+            <a:r>
+              <a:t>   it? Who disagrees, and on what</a:t>
+            </a:r>
+          </a:p>
+          <a:p>
+            <a:pPr>
+              <a:spcAft>
+                <a:spcPts val="600"/>
+              </a:spcAft>
+              <a:defRPr sz="1250">
+                <a:solidFill>
+                  <a:srgbClr val="8B96AD"/>
+                </a:solidFill>
+              </a:defRPr>
+            </a:pPr>
+            <a:r>
+              <a:t>   grounds?”</a:t>
+            </a:r>
+          </a:p>
+          <a:p>
+            <a:pPr>
+              <a:spcAft>
+                <a:spcPts val="600"/>
+              </a:spcAft>
+              <a:defRPr sz="1250">
+                <a:solidFill>
+                  <a:srgbClr val="8B96AD"/>
+                </a:solidFill>
+              </a:defRPr>
+            </a:pPr>
+          </a:p>
+          <a:p>
+            <a:pPr>
+              <a:spcAft>
+                <a:spcPts val="600"/>
+              </a:spcAft>
+              <a:defRPr sz="1250">
+                <a:solidFill>
+                  <a:srgbClr val="8B96AD"/>
+                </a:solidFill>
+              </a:defRPr>
+            </a:pPr>
+            <a:r>
+              <a:t>…and issues those questions as REAL</a:t>
+            </a:r>
+          </a:p>
+          <a:p>
+            <a:pPr>
+              <a:spcAft>
+                <a:spcPts val="600"/>
+              </a:spcAft>
+              <a:defRPr sz="1250">
+                <a:solidFill>
+                  <a:srgbClr val="8B96AD"/>
+                </a:solidFill>
+              </a:defRPr>
+            </a:pPr>
+            <a:r>
+              <a:t>searches — not rhetorical questions.</a:t>
             </a:r>
           </a:p>
         </p:txBody>
@@ -4450,8 +4654,8 @@
         </p:nvSpPr>
         <p:spPr>
           <a:xfrm>
-            <a:off x="4297680" y="1737360"/>
-            <a:ext cx="3566160" cy="2377440"/>
+            <a:off x="6309360" y="1737360"/>
+            <a:ext cx="5303520" cy="4206240"/>
           </a:xfrm>
           <a:prstGeom prst="rect">
             <a:avLst/>
@@ -4489,12 +4693,12 @@
               </a:spcAft>
               <a:defRPr sz="1500" b="1">
                 <a:solidFill>
-                  <a:srgbClr val="FF5D6C"/>
-                </a:solidFill>
-              </a:defRPr>
-            </a:pPr>
-            <a:r>
-              <a:t>B · SKEPTIC</a:t>
+                  <a:srgbClr val="2ECC8F"/>
+                </a:solidFill>
+              </a:defRPr>
+            </a:pPr>
+            <a:r>
+              <a:t>WHAT THE COURT RECEIVES</a:t>
             </a:r>
           </a:p>
           <a:p>
@@ -4509,7 +4713,7 @@
               </a:defRPr>
             </a:pPr>
             <a:r>
-              <a:t>“How could this be wrong?”</a:t>
+              <a:t>• 3 hypotheses with prior plausibility</a:t>
             </a:r>
           </a:p>
           <a:p>
@@ -4524,7 +4728,7 @@
               </a:defRPr>
             </a:pPr>
             <a:r>
-              <a:t>Actively attacks each claim; defaults</a:t>
+              <a:t>• counter-evidence searches already run</a:t>
             </a:r>
           </a:p>
           <a:p>
@@ -4539,21 +4743,202 @@
               </a:defRPr>
             </a:pPr>
             <a:r>
-              <a:t>to insufficient without strong evidence.</a:t>
-            </a:r>
-          </a:p>
-        </p:txBody>
-      </p:sp>
-      <p:sp>
-        <p:nvSpPr>
-          <p:cNvPr id="5" name="Rectangle 4"/>
+              <a:t>• self-identified weaknesses per hypothesis</a:t>
+            </a:r>
+          </a:p>
+          <a:p>
+            <a:pPr>
+              <a:spcAft>
+                <a:spcPts val="600"/>
+              </a:spcAft>
+              <a:defRPr sz="1250">
+                <a:solidFill>
+                  <a:srgbClr val="8B96AD"/>
+                </a:solidFill>
+              </a:defRPr>
+            </a:pPr>
+            <a:r>
+              <a:t>  (single-source dependence, confounders,</a:t>
+            </a:r>
+          </a:p>
+          <a:p>
+            <a:pPr>
+              <a:spcAft>
+                <a:spcPts val="600"/>
+              </a:spcAft>
+              <a:defRPr sz="1250">
+                <a:solidFill>
+                  <a:srgbClr val="8B96AD"/>
+                </a:solidFill>
+              </a:defRPr>
+            </a:pPr>
+            <a:r>
+              <a:t>   unverifiable premises)</a:t>
+            </a:r>
+          </a:p>
+          <a:p>
+            <a:pPr>
+              <a:spcAft>
+                <a:spcPts val="600"/>
+              </a:spcAft>
+              <a:defRPr sz="1250">
+                <a:solidFill>
+                  <a:srgbClr val="8B96AD"/>
+                </a:solidFill>
+              </a:defRPr>
+            </a:pPr>
+            <a:r>
+              <a:t>• full-text sources (Serper → Tavily),</a:t>
+            </a:r>
+          </a:p>
+          <a:p>
+            <a:pPr>
+              <a:spcAft>
+                <a:spcPts val="600"/>
+              </a:spcAft>
+              <a:defRPr sz="1250">
+                <a:solidFill>
+                  <a:srgbClr val="8B96AD"/>
+                </a:solidFill>
+              </a:defRPr>
+            </a:pPr>
+            <a:r>
+              <a:t>  chunked and SHA-256 hashed</a:t>
+            </a:r>
+          </a:p>
+          <a:p>
+            <a:pPr>
+              <a:spcAft>
+                <a:spcPts val="600"/>
+              </a:spcAft>
+              <a:defRPr sz="1250">
+                <a:solidFill>
+                  <a:srgbClr val="8B96AD"/>
+                </a:solidFill>
+              </a:defRPr>
+            </a:pPr>
+          </a:p>
+          <a:p>
+            <a:pPr>
+              <a:spcAft>
+                <a:spcPts val="600"/>
+              </a:spcAft>
+              <a:defRPr sz="1250">
+                <a:solidFill>
+                  <a:srgbClr val="8B96AD"/>
+                </a:solidFill>
+              </a:defRPr>
+            </a:pPr>
+            <a:r>
+              <a:t>Hallucination is pre-filtered at the</a:t>
+            </a:r>
+          </a:p>
+          <a:p>
+            <a:pPr>
+              <a:spcAft>
+                <a:spcPts val="600"/>
+              </a:spcAft>
+              <a:defRPr sz="1250">
+                <a:solidFill>
+                  <a:srgbClr val="8B96AD"/>
+                </a:solidFill>
+              </a:defRPr>
+            </a:pPr>
+            <a:r>
+              <a:t>source — before verification begins.</a:t>
+            </a:r>
+          </a:p>
+        </p:txBody>
+      </p:sp>
+    </p:spTree>
+  </p:cSld>
+  <p:clrMapOvr>
+    <a:masterClrMapping/>
+  </p:clrMapOvr>
+</p:sld>
+</file>
+
+<file path=ppt/slides/slide5.xml><?xml version="1.0" encoding="utf-8"?>
+<p:sld xmlns:a="http://schemas.openxmlformats.org/drawingml/2006/main" xmlns:p="http://schemas.openxmlformats.org/presentationml/2006/main" xmlns:r="http://schemas.openxmlformats.org/officeDocument/2006/relationships">
+  <p:cSld>
+    <p:bg>
+      <p:bgPr>
+        <a:solidFill>
+          <a:srgbClr val="0A0E17"/>
+        </a:solidFill>
+        <a:effectLst/>
+      </p:bgPr>
+    </p:bg>
+    <p:spTree>
+      <p:nvGrpSpPr>
+        <p:cNvPr id="1" name=""/>
+        <p:cNvGrpSpPr/>
+        <p:nvPr/>
+      </p:nvGrpSpPr>
+      <p:grpSpPr/>
+      <p:sp>
+        <p:nvSpPr>
+          <p:cNvPr id="2" name="TextBox 1"/>
+          <p:cNvSpPr txBox="1"/>
+          <p:nvPr/>
+        </p:nvSpPr>
+        <p:spPr>
+          <a:xfrm>
+            <a:off x="640080" y="411480"/>
+            <a:ext cx="10972800" cy="1097280"/>
+          </a:xfrm>
+          <a:prstGeom prst="rect">
+            <a:avLst/>
+          </a:prstGeom>
+          <a:noFill/>
+        </p:spPr>
+        <p:txBody>
+          <a:bodyPr wrap="square">
+            <a:spAutoFit/>
+          </a:bodyPr>
+          <a:lstStyle/>
+          <a:p>
+            <a:pPr algn="l">
+              <a:spcAft>
+                <a:spcPts val="800"/>
+              </a:spcAft>
+              <a:defRPr sz="1300" b="1">
+                <a:solidFill>
+                  <a:srgbClr val="4F8CFF"/>
+                </a:solidFill>
+              </a:defRPr>
+            </a:pPr>
+            <a:r>
+              <a:t>THE TRUST LAYER</a:t>
+            </a:r>
+          </a:p>
+          <a:p>
+            <a:pPr algn="l">
+              <a:spcAft>
+                <a:spcPts val="0"/>
+              </a:spcAft>
+              <a:defRPr sz="3400" b="1">
+                <a:solidFill>
+                  <a:srgbClr val="E8ECF4"/>
+                </a:solidFill>
+              </a:defRPr>
+            </a:pPr>
+            <a:r>
+              <a:t>Citations as cryptographic artifacts (FEC)</a:t>
+            </a:r>
+          </a:p>
+        </p:txBody>
+      </p:sp>
+      <p:sp>
+        <p:nvSpPr>
+          <p:cNvPr id="3" name="Rectangle 2"/>
           <p:cNvSpPr/>
           <p:nvPr/>
         </p:nvSpPr>
         <p:spPr>
           <a:xfrm>
-            <a:off x="8046720" y="1737360"/>
-            <a:ext cx="3566160" cy="2377440"/>
+            <a:off x="548640" y="1737360"/>
+            <a:ext cx="5486400" cy="2011680"/>
           </a:xfrm>
           <a:prstGeom prst="rect">
             <a:avLst/>
@@ -4591,12 +4976,12 @@
               </a:spcAft>
               <a:defRPr sz="1500" b="1">
                 <a:solidFill>
-                  <a:srgbClr val="F5B942"/>
-                </a:solidFill>
-              </a:defRPr>
-            </a:pPr>
-            <a:r>
-              <a:t>C · CONTEXTUALIST</a:t>
+                  <a:srgbClr val="FF5D6C"/>
+                </a:solidFill>
+              </a:defRPr>
+            </a:pPr>
+            <a:r>
+              <a:t>SPANN GATE + SIGNED VERDICTS</a:t>
             </a:r>
           </a:p>
           <a:p>
@@ -4611,7 +4996,7 @@
               </a:defRPr>
             </a:pPr>
             <a:r>
-              <a:t>“Is this precise and current?”</a:t>
+              <a:t>Every verdict must quote an evidence span</a:t>
             </a:r>
           </a:p>
           <a:p>
@@ -4626,7 +5011,7 @@
               </a:defRPr>
             </a:pPr>
             <a:r>
-              <a:t>Checks dates, numbers, scope —</a:t>
+              <a:t>that exists VERBATIM in the corpus —</a:t>
             </a:r>
           </a:p>
           <a:p>
@@ -4641,193 +5026,22 @@
               </a:defRPr>
             </a:pPr>
             <a:r>
-              <a:t>flags outdated or overstated claims.</a:t>
-            </a:r>
-          </a:p>
-        </p:txBody>
-      </p:sp>
-      <p:sp>
-        <p:nvSpPr>
-          <p:cNvPr id="6" name="TextBox 5"/>
-          <p:cNvSpPr txBox="1"/>
-          <p:nvPr/>
-        </p:nvSpPr>
-        <p:spPr>
-          <a:xfrm>
-            <a:off x="640080" y="4389120"/>
-            <a:ext cx="10972800" cy="2011680"/>
-          </a:xfrm>
-          <a:prstGeom prst="rect">
-            <a:avLst/>
-          </a:prstGeom>
-          <a:noFill/>
-        </p:spPr>
-        <p:txBody>
-          <a:bodyPr wrap="none">
-            <a:spAutoFit/>
-          </a:bodyPr>
-          <a:lstStyle/>
-          <a:p/>
-          <a:p>
-            <a:pPr>
-              <a:spcAft>
-                <a:spcPts val="600"/>
-              </a:spcAft>
-              <a:defRPr sz="1500">
-                <a:solidFill>
-                  <a:srgbClr val="E8ECF4"/>
-                </a:solidFill>
-              </a:defRPr>
-            </a:pPr>
-            <a:r>
-              <a:t>Why it matters: “Why Do Multi-Agent LLM Systems Fail?” (2025) found verifier superficiality is the #1 failure mode — task-focused verifiers gave +15.6% accuracy.</a:t>
-            </a:r>
-          </a:p>
-          <a:p>
-            <a:pPr>
-              <a:spcAft>
-                <a:spcPts val="600"/>
-              </a:spcAft>
-              <a:defRPr sz="1500">
-                <a:solidFill>
-                  <a:srgbClr val="2ECC8F"/>
-                </a:solidFill>
-              </a:defRPr>
-            </a:pPr>
-            <a:r>
-              <a:t>Anti-superficiality rule: every verdict MUST cite source IDs. Evidence-free verdicts are structurally invalid.</a:t>
-            </a:r>
-          </a:p>
-          <a:p>
-            <a:pPr>
-              <a:spcAft>
-                <a:spcPts val="600"/>
-              </a:spcAft>
-              <a:defRPr sz="1500">
-                <a:solidFill>
-                  <a:srgbClr val="E8ECF4"/>
-                </a:solidFill>
-              </a:defRPr>
-            </a:pPr>
-            <a:r>
-              <a:t>≥2 support → verified · ≥2 refute → contradicted · mixed → disputed · all insufficient → unverified.</a:t>
-            </a:r>
-          </a:p>
-        </p:txBody>
-      </p:sp>
-    </p:spTree>
-  </p:cSld>
-  <p:clrMapOvr>
-    <a:masterClrMapping/>
-  </p:clrMapOvr>
-</p:sld>
-</file>
-
-<file path=ppt/slides/slide5.xml><?xml version="1.0" encoding="utf-8"?>
-<p:sld xmlns:a="http://schemas.openxmlformats.org/drawingml/2006/main" xmlns:p="http://schemas.openxmlformats.org/presentationml/2006/main" xmlns:r="http://schemas.openxmlformats.org/officeDocument/2006/relationships">
-  <p:cSld>
-    <p:bg>
-      <p:bgPr>
-        <a:solidFill>
-          <a:srgbClr val="0A0E17"/>
-        </a:solidFill>
-        <a:effectLst/>
-      </p:bgPr>
-    </p:bg>
-    <p:spTree>
-      <p:nvGrpSpPr>
-        <p:cNvPr id="1" name=""/>
-        <p:cNvGrpSpPr/>
-        <p:nvPr/>
-      </p:nvGrpSpPr>
-      <p:grpSpPr/>
-      <p:sp>
-        <p:nvSpPr>
-          <p:cNvPr id="2" name="TextBox 1"/>
-          <p:cNvSpPr txBox="1"/>
-          <p:nvPr/>
-        </p:nvSpPr>
-        <p:spPr>
-          <a:xfrm>
-            <a:off x="640080" y="411480"/>
-            <a:ext cx="10972800" cy="1097280"/>
-          </a:xfrm>
-          <a:prstGeom prst="rect">
-            <a:avLst/>
-          </a:prstGeom>
-          <a:noFill/>
-        </p:spPr>
-        <p:txBody>
-          <a:bodyPr wrap="square">
-            <a:spAutoFit/>
-          </a:bodyPr>
-          <a:lstStyle/>
-          <a:p>
-            <a:pPr algn="l">
-              <a:spcAft>
-                <a:spcPts val="800"/>
-              </a:spcAft>
-              <a:defRPr sz="1300" b="1">
-                <a:solidFill>
-                  <a:srgbClr val="4F8CFF"/>
-                </a:solidFill>
-              </a:defRPr>
-            </a:pPr>
-            <a:r>
-              <a:t>RIGOR</a:t>
-            </a:r>
-          </a:p>
-          <a:p>
-            <a:pPr algn="l">
-              <a:spcAft>
-                <a:spcPts val="0"/>
-              </a:spcAft>
-              <a:defRPr sz="3400" b="1">
-                <a:solidFill>
-                  <a:srgbClr val="E8ECF4"/>
-                </a:solidFill>
-              </a:defRPr>
-            </a:pPr>
-            <a:r>
-              <a:t>Confidence is computed — never self-reported</a:t>
-            </a:r>
-          </a:p>
-        </p:txBody>
-      </p:sp>
-      <p:sp>
-        <p:nvSpPr>
-          <p:cNvPr id="3" name="TextBox 2"/>
-          <p:cNvSpPr txBox="1"/>
-          <p:nvPr/>
-        </p:nvSpPr>
-        <p:spPr>
-          <a:xfrm>
-            <a:off x="640080" y="1737360"/>
-            <a:ext cx="10972800" cy="1280160"/>
-          </a:xfrm>
-          <a:prstGeom prst="rect">
-            <a:avLst/>
-          </a:prstGeom>
-          <a:noFill/>
-        </p:spPr>
-        <p:txBody>
-          <a:bodyPr wrap="square">
-            <a:spAutoFit/>
-          </a:bodyPr>
-          <a:lstStyle/>
-          <a:p>
-            <a:pPr algn="l">
-              <a:spcAft>
-                <a:spcPts val="800"/>
-              </a:spcAft>
-              <a:defRPr sz="1600" b="0">
-                <a:solidFill>
-                  <a:srgbClr val="8B96AD"/>
-                </a:solidFill>
-              </a:defRPr>
-            </a:pPr>
-            <a:r>
-              <a:t>LLMs report ~100% confidence even when wrong. VeriFact derives confidence deterministically from verification signals:</a:t>
+              <a:t>fabricated quotes void the verdict.</a:t>
+            </a:r>
+          </a:p>
+          <a:p>
+            <a:pPr>
+              <a:spcAft>
+                <a:spcPts val="600"/>
+              </a:spcAft>
+              <a:defRPr sz="1250">
+                <a:solidFill>
+                  <a:srgbClr val="8B96AD"/>
+                </a:solidFill>
+              </a:defRPr>
+            </a:pPr>
+            <a:r>
+              <a:t>Verdicts are HMAC-signed per run.</a:t>
             </a:r>
           </a:p>
         </p:txBody>
@@ -4840,8 +5054,8 @@
         </p:nvSpPr>
         <p:spPr>
           <a:xfrm>
-            <a:off x="548640" y="2926080"/>
-            <a:ext cx="6949440" cy="3108960"/>
+            <a:off x="6309360" y="1737360"/>
+            <a:ext cx="5303520" cy="2011680"/>
           </a:xfrm>
           <a:prstGeom prst="rect">
             <a:avLst/>
@@ -4884,7 +5098,7 @@
               </a:defRPr>
             </a:pPr>
             <a:r>
-              <a:t>THE FORMULA</a:t>
+              <a:t>MERKLE ANCHORING</a:t>
             </a:r>
           </a:p>
           <a:p>
@@ -4899,7 +5113,7 @@
               </a:defRPr>
             </a:pPr>
             <a:r>
-              <a:t>confidence = 40 × verifier agreement</a:t>
+              <a:t>Every chunk hashed; the run's chunks form</a:t>
             </a:r>
           </a:p>
           <a:p>
@@ -4914,7 +5128,7 @@
               </a:defRPr>
             </a:pPr>
             <a:r>
-              <a:t>               + 25 × source coverage</a:t>
+              <a:t>a Merkle tree. Each claim stores the proof</a:t>
             </a:r>
           </a:p>
           <a:p>
@@ -4929,7 +5143,7 @@
               </a:defRPr>
             </a:pPr>
             <a:r>
-              <a:t>               + 20 × source quality (relevance)</a:t>
+              <a:t>path for its cited chunks — verified</a:t>
             </a:r>
           </a:p>
           <a:p>
@@ -4944,223 +5158,76 @@
               </a:defRPr>
             </a:pPr>
             <a:r>
-              <a:t>               + 15 × specificity</a:t>
-            </a:r>
-          </a:p>
-          <a:p>
-            <a:pPr>
-              <a:spcAft>
-                <a:spcPts val="600"/>
-              </a:spcAft>
-              <a:defRPr sz="1250">
-                <a:solidFill>
-                  <a:srgbClr val="8B96AD"/>
-                </a:solidFill>
-              </a:defRPr>
-            </a:pPr>
-            <a:r>
-              <a:t>               − 30 × contradiction penalty</a:t>
-            </a:r>
-          </a:p>
-          <a:p>
-            <a:pPr>
-              <a:spcAft>
-                <a:spcPts val="600"/>
-              </a:spcAft>
-              <a:defRPr sz="1250">
-                <a:solidFill>
-                  <a:srgbClr val="8B96AD"/>
-                </a:solidFill>
-              </a:defRPr>
-            </a:pPr>
-          </a:p>
-          <a:p>
-            <a:pPr>
-              <a:spcAft>
-                <a:spcPts val="600"/>
-              </a:spcAft>
-              <a:defRPr sz="1250">
-                <a:solidFill>
-                  <a:srgbClr val="8B96AD"/>
-                </a:solidFill>
-              </a:defRPr>
-            </a:pPr>
-            <a:r>
-              <a:t>clamped to [5, 98] — never 0 (unverifiable ≠ false),</a:t>
-            </a:r>
-          </a:p>
-          <a:p>
-            <a:pPr>
-              <a:spcAft>
-                <a:spcPts val="600"/>
-              </a:spcAft>
-              <a:defRPr sz="1250">
-                <a:solidFill>
-                  <a:srgbClr val="8B96AD"/>
-                </a:solidFill>
-              </a:defRPr>
-            </a:pPr>
-            <a:r>
-              <a:t>never 100 (epistemic honesty)</a:t>
-            </a:r>
-          </a:p>
-        </p:txBody>
-      </p:sp>
-      <p:sp>
-        <p:nvSpPr>
-          <p:cNvPr id="5" name="Rectangle 4"/>
-          <p:cNvSpPr/>
+              <a:t>client-side via Web Crypto. No server trust.</a:t>
+            </a:r>
+          </a:p>
+        </p:txBody>
+      </p:sp>
+      <p:sp>
+        <p:nvSpPr>
+          <p:cNvPr id="5" name="TextBox 4"/>
+          <p:cNvSpPr txBox="1"/>
           <p:nvPr/>
         </p:nvSpPr>
         <p:spPr>
           <a:xfrm>
-            <a:off x="7772400" y="2926080"/>
-            <a:ext cx="3840480" cy="3108960"/>
+            <a:off x="640080" y="4023360"/>
+            <a:ext cx="10972800" cy="2377440"/>
           </a:xfrm>
           <a:prstGeom prst="rect">
             <a:avLst/>
           </a:prstGeom>
-          <a:solidFill>
-            <a:srgbClr val="141B2D"/>
-          </a:solidFill>
-          <a:ln>
-            <a:solidFill>
-              <a:srgbClr val="232E47"/>
-            </a:solidFill>
-          </a:ln>
+          <a:noFill/>
         </p:spPr>
-        <p:style>
-          <a:lnRef idx="1">
-            <a:schemeClr val="accent1"/>
-          </a:lnRef>
-          <a:fillRef idx="3">
-            <a:schemeClr val="accent1"/>
-          </a:fillRef>
-          <a:effectRef idx="2">
-            <a:schemeClr val="accent1"/>
-          </a:effectRef>
-          <a:fontRef idx="minor">
-            <a:schemeClr val="lt1"/>
-          </a:fontRef>
-        </p:style>
-        <p:txBody>
-          <a:bodyPr rtlCol="0" anchor="ctr" wrap="square"/>
-          <a:lstStyle/>
-          <a:p>
-            <a:pPr algn="l">
-              <a:spcAft>
-                <a:spcPts val="800"/>
-              </a:spcAft>
-              <a:defRPr sz="1500" b="1">
+        <p:txBody>
+          <a:bodyPr wrap="none">
+            <a:spAutoFit/>
+          </a:bodyPr>
+          <a:lstStyle/>
+          <a:p/>
+          <a:p>
+            <a:pPr>
+              <a:spcAft>
+                <a:spcPts val="600"/>
+              </a:spcAft>
+              <a:defRPr sz="1500">
+                <a:solidFill>
+                  <a:srgbClr val="E8ECF4"/>
+                </a:solidFill>
+              </a:defRPr>
+            </a:pPr>
+            <a:r>
+              <a:t>Click any citation → the Evidence Inspector shows the exact quoted sentence highlighted in its source chunk, the authority tier, the content hash, and a Merkle proof verified in your browser.</a:t>
+            </a:r>
+          </a:p>
+          <a:p>
+            <a:pPr>
+              <a:spcAft>
+                <a:spcPts val="600"/>
+              </a:spcAft>
+              <a:defRPr sz="1500">
                 <a:solidFill>
                   <a:srgbClr val="2ECC8F"/>
                 </a:solidFill>
               </a:defRPr>
             </a:pPr>
             <a:r>
-              <a:t>STATUS BANDS</a:t>
-            </a:r>
-          </a:p>
-          <a:p>
-            <a:pPr>
-              <a:spcAft>
-                <a:spcPts val="600"/>
-              </a:spcAft>
-              <a:defRPr sz="1250">
-                <a:solidFill>
-                  <a:srgbClr val="8B96AD"/>
-                </a:solidFill>
-              </a:defRPr>
-            </a:pPr>
-            <a:r>
-              <a:t>≥ 75  →  verified</a:t>
-            </a:r>
-          </a:p>
-          <a:p>
-            <a:pPr>
-              <a:spcAft>
-                <a:spcPts val="600"/>
-              </a:spcAft>
-              <a:defRPr sz="1250">
-                <a:solidFill>
-                  <a:srgbClr val="8B96AD"/>
-                </a:solidFill>
-              </a:defRPr>
-            </a:pPr>
-            <a:r>
-              <a:t>50-74 →  disputed</a:t>
-            </a:r>
-          </a:p>
-          <a:p>
-            <a:pPr>
-              <a:spcAft>
-                <a:spcPts val="600"/>
-              </a:spcAft>
-              <a:defRPr sz="1250">
-                <a:solidFill>
-                  <a:srgbClr val="8B96AD"/>
-                </a:solidFill>
-              </a:defRPr>
-            </a:pPr>
-            <a:r>
-              <a:t>25-49 →  unverified</a:t>
-            </a:r>
-          </a:p>
-          <a:p>
-            <a:pPr>
-              <a:spcAft>
-                <a:spcPts val="600"/>
-              </a:spcAft>
-              <a:defRPr sz="1250">
-                <a:solidFill>
-                  <a:srgbClr val="8B96AD"/>
-                </a:solidFill>
-              </a:defRPr>
-            </a:pPr>
-            <a:r>
-              <a:t>&lt; 25  →  contradicted</a:t>
-            </a:r>
-          </a:p>
-          <a:p>
-            <a:pPr>
-              <a:spcAft>
-                <a:spcPts val="600"/>
-              </a:spcAft>
-              <a:defRPr sz="1250">
-                <a:solidFill>
-                  <a:srgbClr val="8B96AD"/>
-                </a:solidFill>
-              </a:defRPr>
-            </a:pPr>
-          </a:p>
-          <a:p>
-            <a:pPr>
-              <a:spcAft>
-                <a:spcPts val="600"/>
-              </a:spcAft>
-              <a:defRPr sz="1250">
-                <a:solidFill>
-                  <a:srgbClr val="8B96AD"/>
-                </a:solidFill>
-              </a:defRPr>
-            </a:pPr>
-            <a:r>
-              <a:t>Report trust score =</a:t>
-            </a:r>
-          </a:p>
-          <a:p>
-            <a:pPr>
-              <a:spcAft>
-                <a:spcPts val="600"/>
-              </a:spcAft>
-              <a:defRPr sz="1250">
-                <a:solidFill>
-                  <a:srgbClr val="8B96AD"/>
-                </a:solidFill>
-              </a:defRPr>
-            </a:pPr>
-            <a:r>
-              <a:t>mean of claim confidences</a:t>
+              <a:t>GET /api/reports/{id}/verify recomputes the root and re-checks every signature from stored data alone — the report proves itself.</a:t>
+            </a:r>
+          </a:p>
+          <a:p>
+            <a:pPr>
+              <a:spcAft>
+                <a:spcPts val="600"/>
+              </a:spcAft>
+              <a:defRPr sz="1600">
+                <a:solidFill>
+                  <a:srgbClr val="F5B942"/>
+                </a:solidFill>
+              </a:defRPr>
+            </a:pPr>
+            <a:r>
+              <a:t>“No more ‘I read it on the internet’ — every claim shows its receipt, and the receipt is math.”</a:t>
             </a:r>
           </a:p>
         </p:txBody>
@@ -5349,7 +5416,7 @@
               </a:defRPr>
             </a:pPr>
             <a:r>
-              <a:t>1. Extractor surfaced the premise itself as Claim 1</a:t>
+              <a:t>1. Murli formed 3 hypotheses + counter-searches</a:t>
             </a:r>
           </a:p>
           <a:p>
@@ -5364,7 +5431,7 @@
               </a:defRPr>
             </a:pPr>
             <a:r>
-              <a:t>2. All three verifiers: A=refute B=refute C=refute</a:t>
+              <a:t>2. Extractor surfaced the premise as Claim 1</a:t>
             </a:r>
           </a:p>
           <a:p>
@@ -5379,7 +5446,7 @@
               </a:defRPr>
             </a:pPr>
             <a:r>
-              <a:t>3. Claim 1 → CONTRADICTED (95% confidence it is false)</a:t>
+              <a:t>3. All three verifiers: A=refute B=refute C=refute</a:t>
             </a:r>
           </a:p>
           <a:p>
@@ -5394,7 +5461,7 @@
               </a:defRPr>
             </a:pPr>
             <a:r>
-              <a:t>4. Report opens: “Contrary to the common claim…</a:t>
+              <a:t>4. Claim 1 → REFUTED with exact quotes from</a:t>
             </a:r>
           </a:p>
           <a:p>
@@ -5409,7 +5476,7 @@
               </a:defRPr>
             </a:pPr>
             <a:r>
-              <a:t>   he won for the law of the photoelectric effect [1][5]”</a:t>
+              <a:t>   nobelprize.org, span-validated + signed</a:t>
             </a:r>
           </a:p>
           <a:p>
@@ -5424,7 +5491,22 @@
               </a:defRPr>
             </a:pPr>
             <a:r>
-              <a:t>5. Trust score 92 across 8 verified claims</a:t>
+              <a:t>5. Report opens with the correction, not the myth</a:t>
+            </a:r>
+          </a:p>
+          <a:p>
+            <a:pPr>
+              <a:spcAft>
+                <a:spcPts val="600"/>
+              </a:spcAft>
+              <a:defRPr sz="1250">
+                <a:solidFill>
+                  <a:srgbClr val="8B96AD"/>
+                </a:solidFill>
+              </a:defRPr>
+            </a:pPr>
+            <a:r>
+              <a:t>6. Attestation: Merkle root ✓, all signatures ✓</a:t>
             </a:r>
           </a:p>
         </p:txBody>
@@ -5511,7 +5593,7 @@
               </a:defRPr>
             </a:pPr>
             <a:r>
-              <a:t>VeriFact refutes it with receipts.</a:t>
+              <a:t>VeritasAI refutes it with verifiable receipts.</a:t>
             </a:r>
           </a:p>
           <a:p>
@@ -5538,7 +5620,7 @@
               </a:defRPr>
             </a:pPr>
             <a:r>
-              <a:t>Same pipeline on clean topics (Eiffel Tower,</a:t>
+              <a:t>Measured: Great Wall trap → 6 fabricated</a:t>
             </a:r>
           </a:p>
           <a:p>
@@ -5553,7 +5635,7 @@
               </a:defRPr>
             </a:pPr>
             <a:r>
-              <a:t>mRNA vaccines) → high-trust reports,</a:t>
+              <a:t>verifier quotes caught and voided by the</a:t>
             </a:r>
           </a:p>
           <a:p>
@@ -5568,7 +5650,22 @@
               </a:defRPr>
             </a:pPr>
             <a:r>
-              <a:t>zero false alarms.</a:t>
+              <a:t>span gate; premise still REFUTED.</a:t>
+            </a:r>
+          </a:p>
+          <a:p>
+            <a:pPr>
+              <a:spcAft>
+                <a:spcPts val="600"/>
+              </a:spcAft>
+              <a:defRPr sz="1250">
+                <a:solidFill>
+                  <a:srgbClr val="8B96AD"/>
+                </a:solidFill>
+              </a:defRPr>
+            </a:pPr>
+            <a:r>
+              <a:t>Clean topics → high-trust, zero false alarms.</a:t>
             </a:r>
           </a:p>
         </p:txBody>
@@ -5647,7 +5744,7 @@
               </a:defRPr>
             </a:pPr>
             <a:r>
-              <a:t>Tech stack and roadmap</a:t>
+              <a:t>Phase 0-1 shipped · 18-month arc planned</a:t>
             </a:r>
           </a:p>
         </p:txBody>
@@ -5704,7 +5801,7 @@
               </a:defRPr>
             </a:pPr>
             <a:r>
-              <a:t>TECH STACK</a:t>
+              <a:t>TECH STACK (SHIPPED)</a:t>
             </a:r>
           </a:p>
           <a:p>
@@ -5734,7 +5831,7 @@
               </a:defRPr>
             </a:pPr>
             <a:r>
-              <a:t>LLM — Qwen (DashScope, OpenAI-compatible)</a:t>
+              <a:t>LLM — Qwen (DashScope, provider-agnostic layer)</a:t>
             </a:r>
           </a:p>
           <a:p>
@@ -5749,7 +5846,7 @@
               </a:defRPr>
             </a:pPr>
             <a:r>
-              <a:t>Search — Tavily API</a:t>
+              <a:t>Search — Serper.dev (web + scholar + news)</a:t>
             </a:r>
           </a:p>
           <a:p>
@@ -5764,7 +5861,7 @@
               </a:defRPr>
             </a:pPr>
             <a:r>
-              <a:t>Frontend — vanilla JS/CSS (zero build step)</a:t>
+              <a:t>Extraction — Tavily /extract (full text)</a:t>
             </a:r>
           </a:p>
           <a:p>
@@ -5779,7 +5876,7 @@
               </a:defRPr>
             </a:pPr>
             <a:r>
-              <a:t>Deploy — Docker + Render (render.yaml)</a:t>
+              <a:t>Storage — SQLite journal + re-attestation</a:t>
             </a:r>
           </a:p>
           <a:p>
@@ -5793,6 +5890,9 @@
                 </a:solidFill>
               </a:defRPr>
             </a:pPr>
+            <a:r>
+              <a:t>Frontend — vanilla JS + Web Crypto</a:t>
+            </a:r>
           </a:p>
           <a:p>
             <a:pPr>
@@ -5805,9 +5905,6 @@
                 </a:solidFill>
               </a:defRPr>
             </a:pPr>
-            <a:r>
-              <a:t>~2,500 lines · 7 agents · fully async</a:t>
-            </a:r>
           </a:p>
           <a:p>
             <a:pPr>
@@ -5821,7 +5918,22 @@
               </a:defRPr>
             </a:pPr>
             <a:r>
-              <a:t>Typical run: 30-40 seconds end-to-end</a:t>
+              <a:t>~2,900 lines · 10-stage court · fully async</a:t>
+            </a:r>
+          </a:p>
+          <a:p>
+            <a:pPr>
+              <a:spcAft>
+                <a:spcPts val="600"/>
+              </a:spcAft>
+              <a:defRPr sz="1250">
+                <a:solidFill>
+                  <a:srgbClr val="8B96AD"/>
+                </a:solidFill>
+              </a:defRPr>
+            </a:pPr>
+            <a:r>
+              <a:t>Typical run: 60-90 seconds end-to-end</a:t>
             </a:r>
           </a:p>
         </p:txBody>
@@ -5878,7 +5990,7 @@
               </a:defRPr>
             </a:pPr>
             <a:r>
-              <a:t>FUTURE WORK</a:t>
+              <a:t>ROADMAP (MASTER PLAN)</a:t>
             </a:r>
           </a:p>
           <a:p>
@@ -5893,7 +6005,7 @@
               </a:defRPr>
             </a:pPr>
             <a:r>
-              <a:t>Dynamic re-research: low-confidence claims</a:t>
+              <a:t>P2 — Trust engine v2 + FEVER/SciFact eval</a:t>
             </a:r>
           </a:p>
           <a:p>
@@ -5908,7 +6020,7 @@
               </a:defRPr>
             </a:pPr>
             <a:r>
-              <a:t>trigger targeted follow-up searches (LangGraph)</a:t>
+              <a:t>       harness in CI (prove it scientifically)</a:t>
             </a:r>
           </a:p>
           <a:p>
@@ -5923,7 +6035,7 @@
               </a:defRPr>
             </a:pPr>
             <a:r>
-              <a:t>Full-document RAG over uploaded PDFs</a:t>
+              <a:t>P3 — Claim memory + multi-turn debate rounds</a:t>
             </a:r>
           </a:p>
           <a:p>
@@ -5938,7 +6050,7 @@
               </a:defRPr>
             </a:pPr>
             <a:r>
-              <a:t>Browser extension: verify any article in-place</a:t>
+              <a:t>P4 — Argument trees + Debate Theater UI</a:t>
             </a:r>
           </a:p>
           <a:p>
@@ -5953,7 +6065,7 @@
               </a:defRPr>
             </a:pPr>
             <a:r>
-              <a:t>Claim history: track how facts change over time</a:t>
+              <a:t>P5 — ChromaDB: counter-evidence retrieval</a:t>
             </a:r>
           </a:p>
           <a:p>
@@ -5968,7 +6080,7 @@
               </a:defRPr>
             </a:pPr>
             <a:r>
-              <a:t>Multi-model panel: different LLMs per verifier</a:t>
+              <a:t>P6 — Neo4j provenance graph + expert referee</a:t>
             </a:r>
           </a:p>
           <a:p>
@@ -5983,7 +6095,22 @@
               </a:defRPr>
             </a:pPr>
             <a:r>
-              <a:t>for true model diversity</a:t>
+              <a:t>P7 — Temporal durable orchestration</a:t>
+            </a:r>
+          </a:p>
+          <a:p>
+            <a:pPr>
+              <a:spcAft>
+                <a:spcPts val="600"/>
+              </a:spcAft>
+              <a:defRPr sz="1250">
+                <a:solidFill>
+                  <a:srgbClr val="8B96AD"/>
+                </a:solidFill>
+              </a:defRPr>
+            </a:pPr>
+            <a:r>
+              <a:t>P8 — Red-team agent + white-label API</a:t>
             </a:r>
           </a:p>
         </p:txBody>

--- a/submission/VeriFact_Deck.pptx
+++ b/submission/VeriFact_Deck.pptx
@@ -12,6 +12,9 @@
     <p:sldId id="260" r:id="rId11"/>
     <p:sldId id="261" r:id="rId12"/>
     <p:sldId id="262" r:id="rId13"/>
+    <p:sldId id="263" r:id="rId14"/>
+    <p:sldId id="264" r:id="rId15"/>
+    <p:sldId id="265" r:id="rId16"/>
   </p:sldIdLst>
   <p:sldSz cx="12191695" cy="6858000" type="screen4x3"/>
   <p:notesSz cx="6858000" cy="9144000"/>
@@ -3090,7 +3093,7 @@
     <p:bg>
       <p:bgPr>
         <a:solidFill>
-          <a:srgbClr val="0A0E17"/>
+          <a:srgbClr val="14060B"/>
         </a:solidFill>
         <a:effectLst/>
       </p:bgPr>
@@ -3110,8 +3113,8 @@
         </p:nvSpPr>
         <p:spPr>
           <a:xfrm>
-            <a:off x="1097280" y="1371600"/>
-            <a:ext cx="10058400" cy="3108960"/>
+            <a:off x="1097280" y="1188720"/>
+            <a:ext cx="10058400" cy="3291840"/>
           </a:xfrm>
           <a:prstGeom prst="rect">
             <a:avLst/>
@@ -3130,7 +3133,7 @@
               </a:spcAft>
               <a:defRPr sz="5400" b="1">
                 <a:solidFill>
-                  <a:srgbClr val="E8ECF4"/>
+                  <a:srgbClr val="F7EDF1"/>
                 </a:solidFill>
               </a:defRPr>
             </a:pPr>
@@ -3145,7 +3148,7 @@
               </a:spcAft>
               <a:defRPr sz="2400" b="1">
                 <a:solidFill>
-                  <a:srgbClr val="4F8CFF"/>
+                  <a:srgbClr val="FB7185"/>
                 </a:solidFill>
               </a:defRPr>
             </a:pPr>
@@ -3160,12 +3163,12 @@
               </a:spcAft>
               <a:defRPr sz="1700" b="0">
                 <a:solidFill>
-                  <a:srgbClr val="8B96AD"/>
-                </a:solidFill>
-              </a:defRPr>
-            </a:pPr>
-            <a:r>
-              <a:t>Every claim argued over by three adversarial agents, grounded in exact source quotes, and anchored to a Merkle tree you can verify in your browser.</a:t>
+                  <a:srgbClr val="A5828F"/>
+                </a:solidFill>
+              </a:defRPr>
+            </a:pPr>
+            <a:r>
+              <a:t>Ten agents research, argue, verify, and cite in the open. Every claim is a cryptographically verifiable artifact — anchored to a Merkle tree you can check in your own browser.</a:t>
             </a:r>
           </a:p>
         </p:txBody>
@@ -3178,8 +3181,8 @@
         </p:nvSpPr>
         <p:spPr>
           <a:xfrm>
-            <a:off x="1097280" y="4937760"/>
-            <a:ext cx="10058400" cy="1097280"/>
+            <a:off x="1097280" y="4754880"/>
+            <a:ext cx="10058400" cy="1463040"/>
           </a:xfrm>
           <a:prstGeom prst="rect">
             <a:avLst/>
@@ -3198,7 +3201,7 @@
               </a:spcAft>
               <a:defRPr sz="1500" b="0">
                 <a:solidFill>
-                  <a:srgbClr val="8B96AD"/>
+                  <a:srgbClr val="A5828F"/>
                 </a:solidFill>
               </a:defRPr>
             </a:pPr>
@@ -3211,14 +3214,200 @@
               <a:spcAft>
                 <a:spcPts val="800"/>
               </a:spcAft>
-              <a:defRPr sz="1300" b="0">
-                <a:solidFill>
-                  <a:srgbClr val="8B96AD"/>
-                </a:solidFill>
-              </a:defRPr>
-            </a:pPr>
-            <a:r>
-              <a:t>Phase 0-1 of the 18-month master plan</a:t>
+              <a:defRPr sz="1400" b="1">
+                <a:solidFill>
+                  <a:srgbClr val="3ECF8E"/>
+                </a:solidFill>
+              </a:defRPr>
+            </a:pPr>
+            <a:r>
+              <a:t>All 9 phases implemented · 100% trap catch-rate · 0% false alarms</a:t>
+            </a:r>
+          </a:p>
+        </p:txBody>
+      </p:sp>
+    </p:spTree>
+  </p:cSld>
+  <p:clrMapOvr>
+    <a:masterClrMapping/>
+  </p:clrMapOvr>
+</p:sld>
+</file>
+
+<file path=ppt/slides/slide10.xml><?xml version="1.0" encoding="utf-8"?>
+<p:sld xmlns:a="http://schemas.openxmlformats.org/drawingml/2006/main" xmlns:p="http://schemas.openxmlformats.org/presentationml/2006/main" xmlns:r="http://schemas.openxmlformats.org/officeDocument/2006/relationships">
+  <p:cSld>
+    <p:bg>
+      <p:bgPr>
+        <a:solidFill>
+          <a:srgbClr val="14060B"/>
+        </a:solidFill>
+        <a:effectLst/>
+      </p:bgPr>
+    </p:bg>
+    <p:spTree>
+      <p:nvGrpSpPr>
+        <p:cNvPr id="1" name=""/>
+        <p:cNvGrpSpPr/>
+        <p:nvPr/>
+      </p:nvGrpSpPr>
+      <p:grpSpPr/>
+      <p:sp>
+        <p:nvSpPr>
+          <p:cNvPr id="2" name="TextBox 1"/>
+          <p:cNvSpPr txBox="1"/>
+          <p:nvPr/>
+        </p:nvSpPr>
+        <p:spPr>
+          <a:xfrm>
+            <a:off x="1097280" y="1645920"/>
+            <a:ext cx="10058400" cy="4114800"/>
+          </a:xfrm>
+          <a:prstGeom prst="rect">
+            <a:avLst/>
+          </a:prstGeom>
+          <a:noFill/>
+        </p:spPr>
+        <p:txBody>
+          <a:bodyPr wrap="square">
+            <a:spAutoFit/>
+          </a:bodyPr>
+          <a:lstStyle/>
+          <a:p>
+            <a:pPr algn="l">
+              <a:spcAft>
+                <a:spcPts val="800"/>
+              </a:spcAft>
+              <a:defRPr sz="3600" b="1">
+                <a:solidFill>
+                  <a:srgbClr val="F7EDF1"/>
+                </a:solidFill>
+              </a:defRPr>
+            </a:pPr>
+            <a:r>
+              <a:t>“Every claim shows its receipt,</a:t>
+            </a:r>
+          </a:p>
+          <a:p>
+            <a:pPr algn="l">
+              <a:spcAft>
+                <a:spcPts val="800"/>
+              </a:spcAft>
+              <a:defRPr sz="3600" b="1">
+                <a:solidFill>
+                  <a:srgbClr val="F43F5E"/>
+                </a:solidFill>
+              </a:defRPr>
+            </a:pPr>
+            <a:r>
+              <a:t> and the receipt is math.”</a:t>
+            </a:r>
+          </a:p>
+          <a:p>
+            <a:pPr algn="l">
+              <a:spcAft>
+                <a:spcPts val="800"/>
+              </a:spcAft>
+              <a:defRPr sz="1200" b="0">
+                <a:solidFill>
+                  <a:srgbClr val="F7EDF1"/>
+                </a:solidFill>
+              </a:defRPr>
+            </a:pPr>
+          </a:p>
+          <a:p>
+            <a:pPr algn="l">
+              <a:spcAft>
+                <a:spcPts val="800"/>
+              </a:spcAft>
+              <a:defRPr sz="1800" b="0">
+                <a:solidFill>
+                  <a:srgbClr val="A5828F"/>
+                </a:solidFill>
+              </a:defRPr>
+            </a:pPr>
+            <a:r>
+              <a:t>VeritasAI doesn't just answer — it argues, verifies, and proves. Ten agents, one verdict, zero trust required in us.</a:t>
+            </a:r>
+          </a:p>
+          <a:p>
+            <a:pPr algn="l">
+              <a:spcAft>
+                <a:spcPts val="800"/>
+              </a:spcAft>
+              <a:defRPr sz="1200" b="0">
+                <a:solidFill>
+                  <a:srgbClr val="F7EDF1"/>
+                </a:solidFill>
+              </a:defRPr>
+            </a:pPr>
+          </a:p>
+          <a:p>
+            <a:pPr algn="l">
+              <a:spcAft>
+                <a:spcPts val="800"/>
+              </a:spcAft>
+              <a:defRPr sz="1600" b="1">
+                <a:solidFill>
+                  <a:srgbClr val="3ECF8E"/>
+                </a:solidFill>
+              </a:defRPr>
+            </a:pPr>
+            <a:r>
+              <a:t>100% trap catch-rate · 0% false alarms · 56% faster re-runs · Merkle-verified receipts · all 9 phases shipped</a:t>
+            </a:r>
+          </a:p>
+        </p:txBody>
+      </p:sp>
+      <p:sp>
+        <p:nvSpPr>
+          <p:cNvPr id="3" name="TextBox 2"/>
+          <p:cNvSpPr txBox="1"/>
+          <p:nvPr/>
+        </p:nvSpPr>
+        <p:spPr>
+          <a:xfrm>
+            <a:off x="1097280" y="5486400"/>
+            <a:ext cx="10058400" cy="914400"/>
+          </a:xfrm>
+          <a:prstGeom prst="rect">
+            <a:avLst/>
+          </a:prstGeom>
+          <a:noFill/>
+        </p:spPr>
+        <p:txBody>
+          <a:bodyPr wrap="square">
+            <a:spAutoFit/>
+          </a:bodyPr>
+          <a:lstStyle/>
+          <a:p>
+            <a:pPr algn="l">
+              <a:spcAft>
+                <a:spcPts val="800"/>
+              </a:spcAft>
+              <a:defRPr sz="1400" b="0">
+                <a:solidFill>
+                  <a:srgbClr val="A5828F"/>
+                </a:solidFill>
+              </a:defRPr>
+            </a:pPr>
+            <a:r>
+              <a:t>InnovaHack Chapter 1  ·  Domain 3: Gen AI  ·  Problem Statement 1</a:t>
+            </a:r>
+          </a:p>
+          <a:p>
+            <a:pPr algn="l">
+              <a:spcAft>
+                <a:spcPts val="800"/>
+              </a:spcAft>
+              <a:defRPr sz="1400" b="0">
+                <a:solidFill>
+                  <a:srgbClr val="FB7185"/>
+                </a:solidFill>
+              </a:defRPr>
+            </a:pPr>
+            <a:r>
+              <a:t>GitHub: github.com/ArpitKumar8649/Innovahack_chapter1</a:t>
             </a:r>
           </a:p>
         </p:txBody>
@@ -3237,7 +3426,7 @@
     <p:bg>
       <p:bgPr>
         <a:solidFill>
-          <a:srgbClr val="0A0E17"/>
+          <a:srgbClr val="14060B"/>
         </a:solidFill>
         <a:effectLst/>
       </p:bgPr>
@@ -3277,7 +3466,7 @@
               </a:spcAft>
               <a:defRPr sz="1300" b="1">
                 <a:solidFill>
-                  <a:srgbClr val="4F8CFF"/>
+                  <a:srgbClr val="F43F5E"/>
                 </a:solidFill>
               </a:defRPr>
             </a:pPr>
@@ -3292,7 +3481,7 @@
               </a:spcAft>
               <a:defRPr sz="3400" b="1">
                 <a:solidFill>
-                  <a:srgbClr val="E8ECF4"/>
+                  <a:srgbClr val="F7EDF1"/>
                 </a:solidFill>
               </a:defRPr>
             </a:pPr>
@@ -3331,7 +3520,7 @@
               </a:spcAft>
               <a:defRPr sz="1700">
                 <a:solidFill>
-                  <a:srgbClr val="E8ECF4"/>
+                  <a:srgbClr val="F7EDF1"/>
                 </a:solidFill>
               </a:defRPr>
             </a:pPr>
@@ -3346,7 +3535,7 @@
               </a:spcAft>
               <a:defRPr sz="1700">
                 <a:solidFill>
-                  <a:srgbClr val="E8ECF4"/>
+                  <a:srgbClr val="F7EDF1"/>
                 </a:solidFill>
               </a:defRPr>
             </a:pPr>
@@ -3376,7 +3565,7 @@
               </a:spcAft>
               <a:defRPr sz="1700">
                 <a:solidFill>
-                  <a:srgbClr val="E8ECF4"/>
+                  <a:srgbClr val="F7EDF1"/>
                 </a:solidFill>
               </a:defRPr>
             </a:pPr>
@@ -3391,7 +3580,7 @@
               </a:spcAft>
               <a:defRPr sz="1900">
                 <a:solidFill>
-                  <a:srgbClr val="2ECC8F"/>
+                  <a:srgbClr val="3ECF8E"/>
                 </a:solidFill>
               </a:defRPr>
             </a:pPr>
@@ -3415,7 +3604,7 @@
     <p:bg>
       <p:bgPr>
         <a:solidFill>
-          <a:srgbClr val="0A0E17"/>
+          <a:srgbClr val="14060B"/>
         </a:solidFill>
         <a:effectLst/>
       </p:bgPr>
@@ -3455,7 +3644,7 @@
               </a:spcAft>
               <a:defRPr sz="1300" b="1">
                 <a:solidFill>
-                  <a:srgbClr val="4F8CFF"/>
+                  <a:srgbClr val="F43F5E"/>
                 </a:solidFill>
               </a:defRPr>
             </a:pPr>
@@ -3470,7 +3659,7 @@
               </a:spcAft>
               <a:defRPr sz="3400" b="1">
                 <a:solidFill>
-                  <a:srgbClr val="E8ECF4"/>
+                  <a:srgbClr val="F7EDF1"/>
                 </a:solidFill>
               </a:defRPr>
             </a:pPr>
@@ -3495,11 +3684,11 @@
             <a:avLst/>
           </a:prstGeom>
           <a:solidFill>
-            <a:srgbClr val="141B2D"/>
+            <a:srgbClr val="241019"/>
           </a:solidFill>
           <a:ln>
             <a:solidFill>
-              <a:srgbClr val="232E47"/>
+              <a:srgbClr val="4A2436"/>
             </a:solidFill>
           </a:ln>
         </p:spPr>
@@ -3527,7 +3716,7 @@
               </a:spcAft>
               <a:defRPr sz="1250" b="1">
                 <a:solidFill>
-                  <a:srgbClr val="E8ECF4"/>
+                  <a:srgbClr val="F7EDF1"/>
                 </a:solidFill>
               </a:defRPr>
             </a:pPr>
@@ -3542,7 +3731,7 @@
               </a:spcAft>
               <a:defRPr sz="1100">
                 <a:solidFill>
-                  <a:srgbClr val="8B96AD"/>
+                  <a:srgbClr val="A5828F"/>
                 </a:solidFill>
               </a:defRPr>
             </a:pPr>
@@ -3557,7 +3746,7 @@
               </a:spcAft>
               <a:defRPr sz="1100">
                 <a:solidFill>
-                  <a:srgbClr val="8B96AD"/>
+                  <a:srgbClr val="A5828F"/>
                 </a:solidFill>
               </a:defRPr>
             </a:pPr>
@@ -3572,7 +3761,7 @@
               </a:spcAft>
               <a:defRPr sz="1100">
                 <a:solidFill>
-                  <a:srgbClr val="8B96AD"/>
+                  <a:srgbClr val="A5828F"/>
                 </a:solidFill>
               </a:defRPr>
             </a:pPr>
@@ -3610,7 +3799,7 @@
               </a:spcAft>
               <a:defRPr sz="2000" b="0">
                 <a:solidFill>
-                  <a:srgbClr val="4F8CFF"/>
+                  <a:srgbClr val="F43F5E"/>
                 </a:solidFill>
               </a:defRPr>
             </a:pPr>
@@ -3635,11 +3824,11 @@
             <a:avLst/>
           </a:prstGeom>
           <a:solidFill>
-            <a:srgbClr val="141B2D"/>
+            <a:srgbClr val="241019"/>
           </a:solidFill>
           <a:ln>
             <a:solidFill>
-              <a:srgbClr val="232E47"/>
+              <a:srgbClr val="4A2436"/>
             </a:solidFill>
           </a:ln>
         </p:spPr>
@@ -3667,7 +3856,7 @@
               </a:spcAft>
               <a:defRPr sz="1250" b="1">
                 <a:solidFill>
-                  <a:srgbClr val="E8ECF4"/>
+                  <a:srgbClr val="F7EDF1"/>
                 </a:solidFill>
               </a:defRPr>
             </a:pPr>
@@ -3682,7 +3871,7 @@
               </a:spcAft>
               <a:defRPr sz="1100">
                 <a:solidFill>
-                  <a:srgbClr val="8B96AD"/>
+                  <a:srgbClr val="A5828F"/>
                 </a:solidFill>
               </a:defRPr>
             </a:pPr>
@@ -3697,7 +3886,7 @@
               </a:spcAft>
               <a:defRPr sz="1100">
                 <a:solidFill>
-                  <a:srgbClr val="8B96AD"/>
+                  <a:srgbClr val="A5828F"/>
                 </a:solidFill>
               </a:defRPr>
             </a:pPr>
@@ -3712,7 +3901,7 @@
               </a:spcAft>
               <a:defRPr sz="1100">
                 <a:solidFill>
-                  <a:srgbClr val="8B96AD"/>
+                  <a:srgbClr val="A5828F"/>
                 </a:solidFill>
               </a:defRPr>
             </a:pPr>
@@ -3750,7 +3939,7 @@
               </a:spcAft>
               <a:defRPr sz="2000" b="0">
                 <a:solidFill>
-                  <a:srgbClr val="4F8CFF"/>
+                  <a:srgbClr val="F43F5E"/>
                 </a:solidFill>
               </a:defRPr>
             </a:pPr>
@@ -3775,11 +3964,11 @@
             <a:avLst/>
           </a:prstGeom>
           <a:solidFill>
-            <a:srgbClr val="141B2D"/>
+            <a:srgbClr val="241019"/>
           </a:solidFill>
           <a:ln>
             <a:solidFill>
-              <a:srgbClr val="232E47"/>
+              <a:srgbClr val="4A2436"/>
             </a:solidFill>
           </a:ln>
         </p:spPr>
@@ -3807,7 +3996,7 @@
               </a:spcAft>
               <a:defRPr sz="1250" b="1">
                 <a:solidFill>
-                  <a:srgbClr val="E8ECF4"/>
+                  <a:srgbClr val="F7EDF1"/>
                 </a:solidFill>
               </a:defRPr>
             </a:pPr>
@@ -3822,7 +4011,7 @@
               </a:spcAft>
               <a:defRPr sz="1100">
                 <a:solidFill>
-                  <a:srgbClr val="8B96AD"/>
+                  <a:srgbClr val="A5828F"/>
                 </a:solidFill>
               </a:defRPr>
             </a:pPr>
@@ -3837,7 +4026,7 @@
               </a:spcAft>
               <a:defRPr sz="1100">
                 <a:solidFill>
-                  <a:srgbClr val="8B96AD"/>
+                  <a:srgbClr val="A5828F"/>
                 </a:solidFill>
               </a:defRPr>
             </a:pPr>
@@ -3852,12 +4041,12 @@
               </a:spcAft>
               <a:defRPr sz="1100">
                 <a:solidFill>
-                  <a:srgbClr val="8B96AD"/>
-                </a:solidFill>
-              </a:defRPr>
-            </a:pPr>
-            <a:r>
-              <a:t>evidence chunks</a:t>
+                  <a:srgbClr val="A5828F"/>
+                </a:solidFill>
+              </a:defRPr>
+            </a:pPr>
+            <a:r>
+              <a:t>chunks + dedup</a:t>
             </a:r>
           </a:p>
         </p:txBody>
@@ -3890,7 +4079,7 @@
               </a:spcAft>
               <a:defRPr sz="2000" b="0">
                 <a:solidFill>
-                  <a:srgbClr val="4F8CFF"/>
+                  <a:srgbClr val="F43F5E"/>
                 </a:solidFill>
               </a:defRPr>
             </a:pPr>
@@ -3915,11 +4104,11 @@
             <a:avLst/>
           </a:prstGeom>
           <a:solidFill>
-            <a:srgbClr val="141B2D"/>
+            <a:srgbClr val="241019"/>
           </a:solidFill>
           <a:ln>
             <a:solidFill>
-              <a:srgbClr val="4F8CFF"/>
+              <a:srgbClr val="F43F5E"/>
             </a:solidFill>
           </a:ln>
         </p:spPr>
@@ -3947,7 +4136,7 @@
               </a:spcAft>
               <a:defRPr sz="1250" b="1">
                 <a:solidFill>
-                  <a:srgbClr val="4F8CFF"/>
+                  <a:srgbClr val="F43F5E"/>
                 </a:solidFill>
               </a:defRPr>
             </a:pPr>
@@ -3962,7 +4151,7 @@
               </a:spcAft>
               <a:defRPr sz="1100">
                 <a:solidFill>
-                  <a:srgbClr val="8B96AD"/>
+                  <a:srgbClr val="A5828F"/>
                 </a:solidFill>
               </a:defRPr>
             </a:pPr>
@@ -3977,7 +4166,7 @@
               </a:spcAft>
               <a:defRPr sz="1100">
                 <a:solidFill>
-                  <a:srgbClr val="8B96AD"/>
+                  <a:srgbClr val="A5828F"/>
                 </a:solidFill>
               </a:defRPr>
             </a:pPr>
@@ -3992,7 +4181,7 @@
               </a:spcAft>
               <a:defRPr sz="1100">
                 <a:solidFill>
-                  <a:srgbClr val="8B96AD"/>
+                  <a:srgbClr val="A5828F"/>
                 </a:solidFill>
               </a:defRPr>
             </a:pPr>
@@ -4030,7 +4219,7 @@
               </a:spcAft>
               <a:defRPr sz="2000" b="0">
                 <a:solidFill>
-                  <a:srgbClr val="4F8CFF"/>
+                  <a:srgbClr val="F43F5E"/>
                 </a:solidFill>
               </a:defRPr>
             </a:pPr>
@@ -4055,11 +4244,11 @@
             <a:avLst/>
           </a:prstGeom>
           <a:solidFill>
-            <a:srgbClr val="141B2D"/>
+            <a:srgbClr val="241019"/>
           </a:solidFill>
           <a:ln>
             <a:solidFill>
-              <a:srgbClr val="232E47"/>
+              <a:srgbClr val="4A2436"/>
             </a:solidFill>
           </a:ln>
         </p:spPr>
@@ -4087,12 +4276,12 @@
               </a:spcAft>
               <a:defRPr sz="1250" b="1">
                 <a:solidFill>
-                  <a:srgbClr val="E8ECF4"/>
-                </a:solidFill>
-              </a:defRPr>
-            </a:pPr>
-            <a:r>
-              <a:t>6-7 · SWEEPS</a:t>
+                  <a:srgbClr val="F7EDF1"/>
+                </a:solidFill>
+              </a:defRPr>
+            </a:pPr>
+            <a:r>
+              <a:t>6 · DEBATE</a:t>
             </a:r>
           </a:p>
           <a:p>
@@ -4102,12 +4291,12 @@
               </a:spcAft>
               <a:defRPr sz="1100">
                 <a:solidFill>
-                  <a:srgbClr val="8B96AD"/>
-                </a:solidFill>
-              </a:defRPr>
-            </a:pPr>
-            <a:r>
-              <a:t>typed hallucination</a:t>
+                  <a:srgbClr val="A5828F"/>
+                </a:solidFill>
+              </a:defRPr>
+            </a:pPr>
+            <a:r>
+              <a:t>concede / rebut /</a:t>
             </a:r>
           </a:p>
           <a:p>
@@ -4117,12 +4306,12 @@
               </a:spcAft>
               <a:defRPr sz="1100">
                 <a:solidFill>
-                  <a:srgbClr val="8B96AD"/>
-                </a:solidFill>
-              </a:defRPr>
-            </a:pPr>
-            <a:r>
-              <a:t>+ contradiction</a:t>
+                  <a:srgbClr val="A5828F"/>
+                </a:solidFill>
+              </a:defRPr>
+            </a:pPr>
+            <a:r>
+              <a:t>hold → Judge rules</a:t>
             </a:r>
           </a:p>
           <a:p>
@@ -4132,12 +4321,12 @@
               </a:spcAft>
               <a:defRPr sz="1100">
                 <a:solidFill>
-                  <a:srgbClr val="8B96AD"/>
-                </a:solidFill>
-              </a:defRPr>
-            </a:pPr>
-            <a:r>
-              <a:t>detection</a:t>
+                  <a:srgbClr val="A5828F"/>
+                </a:solidFill>
+              </a:defRPr>
+            </a:pPr>
+            <a:r>
+              <a:t>+ records dissent</a:t>
             </a:r>
           </a:p>
         </p:txBody>
@@ -4170,7 +4359,7 @@
               </a:spcAft>
               <a:defRPr sz="2000" b="0">
                 <a:solidFill>
-                  <a:srgbClr val="4F8CFF"/>
+                  <a:srgbClr val="F43F5E"/>
                 </a:solidFill>
               </a:defRPr>
             </a:pPr>
@@ -4195,11 +4384,11 @@
             <a:avLst/>
           </a:prstGeom>
           <a:solidFill>
-            <a:srgbClr val="141B2D"/>
+            <a:srgbClr val="241019"/>
           </a:solidFill>
           <a:ln>
             <a:solidFill>
-              <a:srgbClr val="232E47"/>
+              <a:srgbClr val="4A2436"/>
             </a:solidFill>
           </a:ln>
         </p:spPr>
@@ -4227,12 +4416,12 @@
               </a:spcAft>
               <a:defRPr sz="1250" b="1">
                 <a:solidFill>
-                  <a:srgbClr val="E8ECF4"/>
-                </a:solidFill>
-              </a:defRPr>
-            </a:pPr>
-            <a:r>
-              <a:t>8-10 · VERDICT</a:t>
+                  <a:srgbClr val="F7EDF1"/>
+                </a:solidFill>
+              </a:defRPr>
+            </a:pPr>
+            <a:r>
+              <a:t>7-10 · VERDICT</a:t>
             </a:r>
           </a:p>
           <a:p>
@@ -4242,7 +4431,7 @@
               </a:spcAft>
               <a:defRPr sz="1100">
                 <a:solidFill>
-                  <a:srgbClr val="8B96AD"/>
+                  <a:srgbClr val="A5828F"/>
                 </a:solidFill>
               </a:defRPr>
             </a:pPr>
@@ -4257,12 +4446,12 @@
               </a:spcAft>
               <a:defRPr sz="1100">
                 <a:solidFill>
-                  <a:srgbClr val="8B96AD"/>
-                </a:solidFill>
-              </a:defRPr>
-            </a:pPr>
-            <a:r>
-              <a:t>Merkle root,</a:t>
+                  <a:srgbClr val="A5828F"/>
+                </a:solidFill>
+              </a:defRPr>
+            </a:pPr>
+            <a:r>
+              <a:t>argument tree,</a:t>
             </a:r>
           </a:p>
           <a:p>
@@ -4272,12 +4461,12 @@
               </a:spcAft>
               <a:defRPr sz="1100">
                 <a:solidFill>
-                  <a:srgbClr val="8B96AD"/>
-                </a:solidFill>
-              </a:defRPr>
-            </a:pPr>
-            <a:r>
-              <a:t>SQLite journal</a:t>
+                  <a:srgbClr val="A5828F"/>
+                </a:solidFill>
+              </a:defRPr>
+            </a:pPr>
+            <a:r>
+              <a:t>Merkle root</a:t>
             </a:r>
           </a:p>
         </p:txBody>
@@ -4311,7 +4500,7 @@
               </a:spcAft>
               <a:defRPr sz="1500">
                 <a:solidFill>
-                  <a:srgbClr val="E8ECF4"/>
+                  <a:srgbClr val="F7EDF1"/>
                 </a:solidFill>
               </a:defRPr>
             </a:pPr>
@@ -4326,7 +4515,7 @@
               </a:spcAft>
               <a:defRPr sz="1500">
                 <a:solidFill>
-                  <a:srgbClr val="E8ECF4"/>
+                  <a:srgbClr val="F7EDF1"/>
                 </a:solidFill>
               </a:defRPr>
             </a:pPr>
@@ -4341,12 +4530,12 @@
               </a:spcAft>
               <a:defRPr sz="1500">
                 <a:solidFill>
-                  <a:srgbClr val="E8ECF4"/>
-                </a:solidFill>
-              </a:defRPr>
-            </a:pPr>
-            <a:r>
-              <a:t>• Resilient: per-agent failure tolerance, JSON nudge-retry, graceful degradation to snippet-only mode if extraction fails.</a:t>
+                  <a:srgbClr val="F7EDF1"/>
+                </a:solidFill>
+              </a:defRPr>
+            </a:pPr>
+            <a:r>
+              <a:t>• Resilient: per-agent failure tolerance, JSON nudge-retry, graceful degradation, model auto-fallback on quota exhaustion.</a:t>
             </a:r>
           </a:p>
         </p:txBody>
@@ -4365,7 +4554,7 @@
     <p:bg>
       <p:bgPr>
         <a:solidFill>
-          <a:srgbClr val="0A0E17"/>
+          <a:srgbClr val="14060B"/>
         </a:solidFill>
         <a:effectLst/>
       </p:bgPr>
@@ -4405,7 +4594,7 @@
               </a:spcAft>
               <a:defRPr sz="1300" b="1">
                 <a:solidFill>
-                  <a:srgbClr val="4F8CFF"/>
+                  <a:srgbClr val="F43F5E"/>
                 </a:solidFill>
               </a:defRPr>
             </a:pPr>
@@ -4420,7 +4609,7 @@
               </a:spcAft>
               <a:defRPr sz="3400" b="1">
                 <a:solidFill>
-                  <a:srgbClr val="E8ECF4"/>
+                  <a:srgbClr val="F7EDF1"/>
                 </a:solidFill>
               </a:defRPr>
             </a:pPr>
@@ -4445,11 +4634,11 @@
             <a:avLst/>
           </a:prstGeom>
           <a:solidFill>
-            <a:srgbClr val="141B2D"/>
+            <a:srgbClr val="241019"/>
           </a:solidFill>
           <a:ln>
             <a:solidFill>
-              <a:srgbClr val="232E47"/>
+              <a:srgbClr val="4A2436"/>
             </a:solidFill>
           </a:ln>
         </p:spPr>
@@ -4477,7 +4666,7 @@
               </a:spcAft>
               <a:defRPr sz="1500" b="1">
                 <a:solidFill>
-                  <a:srgbClr val="4F8CFF"/>
+                  <a:srgbClr val="F43F5E"/>
                 </a:solidFill>
               </a:defRPr>
             </a:pPr>
@@ -4492,7 +4681,7 @@
               </a:spcAft>
               <a:defRPr sz="1250">
                 <a:solidFill>
-                  <a:srgbClr val="8B96AD"/>
+                  <a:srgbClr val="A5828F"/>
                 </a:solidFill>
               </a:defRPr>
             </a:pPr>
@@ -4507,7 +4696,7 @@
               </a:spcAft>
               <a:defRPr sz="1250">
                 <a:solidFill>
-                  <a:srgbClr val="8B96AD"/>
+                  <a:srgbClr val="A5828F"/>
                 </a:solidFill>
               </a:defRPr>
             </a:pPr>
@@ -4522,7 +4711,7 @@
               </a:spcAft>
               <a:defRPr sz="1250">
                 <a:solidFill>
-                  <a:srgbClr val="8B96AD"/>
+                  <a:srgbClr val="A5828F"/>
                 </a:solidFill>
               </a:defRPr>
             </a:pPr>
@@ -4537,19 +4726,19 @@
               </a:spcAft>
               <a:defRPr sz="1250">
                 <a:solidFill>
-                  <a:srgbClr val="8B96AD"/>
-                </a:solidFill>
-              </a:defRPr>
-            </a:pPr>
-          </a:p>
-          <a:p>
-            <a:pPr>
-              <a:spcAft>
-                <a:spcPts val="600"/>
-              </a:spcAft>
-              <a:defRPr sz="1250">
-                <a:solidFill>
-                  <a:srgbClr val="8B96AD"/>
+                  <a:srgbClr val="A5828F"/>
+                </a:solidFill>
+              </a:defRPr>
+            </a:pPr>
+          </a:p>
+          <a:p>
+            <a:pPr>
+              <a:spcAft>
+                <a:spcPts val="600"/>
+              </a:spcAft>
+              <a:defRPr sz="1250">
+                <a:solidFill>
+                  <a:srgbClr val="A5828F"/>
                 </a:solidFill>
               </a:defRPr>
             </a:pPr>
@@ -4564,7 +4753,7 @@
               </a:spcAft>
               <a:defRPr sz="1250">
                 <a:solidFill>
-                  <a:srgbClr val="8B96AD"/>
+                  <a:srgbClr val="A5828F"/>
                 </a:solidFill>
               </a:defRPr>
             </a:pPr>
@@ -4579,7 +4768,7 @@
               </a:spcAft>
               <a:defRPr sz="1250">
                 <a:solidFill>
-                  <a:srgbClr val="8B96AD"/>
+                  <a:srgbClr val="A5828F"/>
                 </a:solidFill>
               </a:defRPr>
             </a:pPr>
@@ -4594,7 +4783,7 @@
               </a:spcAft>
               <a:defRPr sz="1250">
                 <a:solidFill>
-                  <a:srgbClr val="8B96AD"/>
+                  <a:srgbClr val="A5828F"/>
                 </a:solidFill>
               </a:defRPr>
             </a:pPr>
@@ -4609,19 +4798,19 @@
               </a:spcAft>
               <a:defRPr sz="1250">
                 <a:solidFill>
-                  <a:srgbClr val="8B96AD"/>
-                </a:solidFill>
-              </a:defRPr>
-            </a:pPr>
-          </a:p>
-          <a:p>
-            <a:pPr>
-              <a:spcAft>
-                <a:spcPts val="600"/>
-              </a:spcAft>
-              <a:defRPr sz="1250">
-                <a:solidFill>
-                  <a:srgbClr val="8B96AD"/>
+                  <a:srgbClr val="A5828F"/>
+                </a:solidFill>
+              </a:defRPr>
+            </a:pPr>
+          </a:p>
+          <a:p>
+            <a:pPr>
+              <a:spcAft>
+                <a:spcPts val="600"/>
+              </a:spcAft>
+              <a:defRPr sz="1250">
+                <a:solidFill>
+                  <a:srgbClr val="A5828F"/>
                 </a:solidFill>
               </a:defRPr>
             </a:pPr>
@@ -4636,7 +4825,7 @@
               </a:spcAft>
               <a:defRPr sz="1250">
                 <a:solidFill>
-                  <a:srgbClr val="8B96AD"/>
+                  <a:srgbClr val="A5828F"/>
                 </a:solidFill>
               </a:defRPr>
             </a:pPr>
@@ -4661,11 +4850,11 @@
             <a:avLst/>
           </a:prstGeom>
           <a:solidFill>
-            <a:srgbClr val="141B2D"/>
+            <a:srgbClr val="241019"/>
           </a:solidFill>
           <a:ln>
             <a:solidFill>
-              <a:srgbClr val="232E47"/>
+              <a:srgbClr val="4A2436"/>
             </a:solidFill>
           </a:ln>
         </p:spPr>
@@ -4693,7 +4882,7 @@
               </a:spcAft>
               <a:defRPr sz="1500" b="1">
                 <a:solidFill>
-                  <a:srgbClr val="2ECC8F"/>
+                  <a:srgbClr val="3ECF8E"/>
                 </a:solidFill>
               </a:defRPr>
             </a:pPr>
@@ -4708,7 +4897,7 @@
               </a:spcAft>
               <a:defRPr sz="1250">
                 <a:solidFill>
-                  <a:srgbClr val="8B96AD"/>
+                  <a:srgbClr val="A5828F"/>
                 </a:solidFill>
               </a:defRPr>
             </a:pPr>
@@ -4723,7 +4912,7 @@
               </a:spcAft>
               <a:defRPr sz="1250">
                 <a:solidFill>
-                  <a:srgbClr val="8B96AD"/>
+                  <a:srgbClr val="A5828F"/>
                 </a:solidFill>
               </a:defRPr>
             </a:pPr>
@@ -4738,7 +4927,7 @@
               </a:spcAft>
               <a:defRPr sz="1250">
                 <a:solidFill>
-                  <a:srgbClr val="8B96AD"/>
+                  <a:srgbClr val="A5828F"/>
                 </a:solidFill>
               </a:defRPr>
             </a:pPr>
@@ -4753,7 +4942,7 @@
               </a:spcAft>
               <a:defRPr sz="1250">
                 <a:solidFill>
-                  <a:srgbClr val="8B96AD"/>
+                  <a:srgbClr val="A5828F"/>
                 </a:solidFill>
               </a:defRPr>
             </a:pPr>
@@ -4768,7 +4957,7 @@
               </a:spcAft>
               <a:defRPr sz="1250">
                 <a:solidFill>
-                  <a:srgbClr val="8B96AD"/>
+                  <a:srgbClr val="A5828F"/>
                 </a:solidFill>
               </a:defRPr>
             </a:pPr>
@@ -4783,7 +4972,7 @@
               </a:spcAft>
               <a:defRPr sz="1250">
                 <a:solidFill>
-                  <a:srgbClr val="8B96AD"/>
+                  <a:srgbClr val="A5828F"/>
                 </a:solidFill>
               </a:defRPr>
             </a:pPr>
@@ -4798,7 +4987,7 @@
               </a:spcAft>
               <a:defRPr sz="1250">
                 <a:solidFill>
-                  <a:srgbClr val="8B96AD"/>
+                  <a:srgbClr val="A5828F"/>
                 </a:solidFill>
               </a:defRPr>
             </a:pPr>
@@ -4813,19 +5002,19 @@
               </a:spcAft>
               <a:defRPr sz="1250">
                 <a:solidFill>
-                  <a:srgbClr val="8B96AD"/>
-                </a:solidFill>
-              </a:defRPr>
-            </a:pPr>
-          </a:p>
-          <a:p>
-            <a:pPr>
-              <a:spcAft>
-                <a:spcPts val="600"/>
-              </a:spcAft>
-              <a:defRPr sz="1250">
-                <a:solidFill>
-                  <a:srgbClr val="8B96AD"/>
+                  <a:srgbClr val="A5828F"/>
+                </a:solidFill>
+              </a:defRPr>
+            </a:pPr>
+          </a:p>
+          <a:p>
+            <a:pPr>
+              <a:spcAft>
+                <a:spcPts val="600"/>
+              </a:spcAft>
+              <a:defRPr sz="1250">
+                <a:solidFill>
+                  <a:srgbClr val="A5828F"/>
                 </a:solidFill>
               </a:defRPr>
             </a:pPr>
@@ -4840,7 +5029,7 @@
               </a:spcAft>
               <a:defRPr sz="1250">
                 <a:solidFill>
-                  <a:srgbClr val="8B96AD"/>
+                  <a:srgbClr val="A5828F"/>
                 </a:solidFill>
               </a:defRPr>
             </a:pPr>
@@ -4864,7 +5053,7 @@
     <p:bg>
       <p:bgPr>
         <a:solidFill>
-          <a:srgbClr val="0A0E17"/>
+          <a:srgbClr val="14060B"/>
         </a:solidFill>
         <a:effectLst/>
       </p:bgPr>
@@ -4904,7 +5093,7 @@
               </a:spcAft>
               <a:defRPr sz="1300" b="1">
                 <a:solidFill>
-                  <a:srgbClr val="4F8CFF"/>
+                  <a:srgbClr val="F43F5E"/>
                 </a:solidFill>
               </a:defRPr>
             </a:pPr>
@@ -4919,7 +5108,7 @@
               </a:spcAft>
               <a:defRPr sz="3400" b="1">
                 <a:solidFill>
-                  <a:srgbClr val="E8ECF4"/>
+                  <a:srgbClr val="F7EDF1"/>
                 </a:solidFill>
               </a:defRPr>
             </a:pPr>
@@ -4944,11 +5133,11 @@
             <a:avLst/>
           </a:prstGeom>
           <a:solidFill>
-            <a:srgbClr val="141B2D"/>
+            <a:srgbClr val="241019"/>
           </a:solidFill>
           <a:ln>
             <a:solidFill>
-              <a:srgbClr val="232E47"/>
+              <a:srgbClr val="4A2436"/>
             </a:solidFill>
           </a:ln>
         </p:spPr>
@@ -4976,22 +5165,22 @@
               </a:spcAft>
               <a:defRPr sz="1500" b="1">
                 <a:solidFill>
-                  <a:srgbClr val="FF5D6C"/>
-                </a:solidFill>
-              </a:defRPr>
-            </a:pPr>
-            <a:r>
-              <a:t>SPANN GATE + SIGNED VERDICTS</a:t>
-            </a:r>
-          </a:p>
-          <a:p>
-            <a:pPr>
-              <a:spcAft>
-                <a:spcPts val="600"/>
-              </a:spcAft>
-              <a:defRPr sz="1250">
-                <a:solidFill>
-                  <a:srgbClr val="8B96AD"/>
+                  <a:srgbClr val="FF6B6B"/>
+                </a:solidFill>
+              </a:defRPr>
+            </a:pPr>
+            <a:r>
+              <a:t>SPAN GATE + SIGNED VERDICTS</a:t>
+            </a:r>
+          </a:p>
+          <a:p>
+            <a:pPr>
+              <a:spcAft>
+                <a:spcPts val="600"/>
+              </a:spcAft>
+              <a:defRPr sz="1250">
+                <a:solidFill>
+                  <a:srgbClr val="A5828F"/>
                 </a:solidFill>
               </a:defRPr>
             </a:pPr>
@@ -5006,7 +5195,7 @@
               </a:spcAft>
               <a:defRPr sz="1250">
                 <a:solidFill>
-                  <a:srgbClr val="8B96AD"/>
+                  <a:srgbClr val="A5828F"/>
                 </a:solidFill>
               </a:defRPr>
             </a:pPr>
@@ -5021,7 +5210,7 @@
               </a:spcAft>
               <a:defRPr sz="1250">
                 <a:solidFill>
-                  <a:srgbClr val="8B96AD"/>
+                  <a:srgbClr val="A5828F"/>
                 </a:solidFill>
               </a:defRPr>
             </a:pPr>
@@ -5036,7 +5225,7 @@
               </a:spcAft>
               <a:defRPr sz="1250">
                 <a:solidFill>
-                  <a:srgbClr val="8B96AD"/>
+                  <a:srgbClr val="A5828F"/>
                 </a:solidFill>
               </a:defRPr>
             </a:pPr>
@@ -5061,11 +5250,11 @@
             <a:avLst/>
           </a:prstGeom>
           <a:solidFill>
-            <a:srgbClr val="141B2D"/>
+            <a:srgbClr val="241019"/>
           </a:solidFill>
           <a:ln>
             <a:solidFill>
-              <a:srgbClr val="232E47"/>
+              <a:srgbClr val="4A2436"/>
             </a:solidFill>
           </a:ln>
         </p:spPr>
@@ -5093,7 +5282,7 @@
               </a:spcAft>
               <a:defRPr sz="1500" b="1">
                 <a:solidFill>
-                  <a:srgbClr val="4F8CFF"/>
+                  <a:srgbClr val="F43F5E"/>
                 </a:solidFill>
               </a:defRPr>
             </a:pPr>
@@ -5108,7 +5297,7 @@
               </a:spcAft>
               <a:defRPr sz="1250">
                 <a:solidFill>
-                  <a:srgbClr val="8B96AD"/>
+                  <a:srgbClr val="A5828F"/>
                 </a:solidFill>
               </a:defRPr>
             </a:pPr>
@@ -5123,7 +5312,7 @@
               </a:spcAft>
               <a:defRPr sz="1250">
                 <a:solidFill>
-                  <a:srgbClr val="8B96AD"/>
+                  <a:srgbClr val="A5828F"/>
                 </a:solidFill>
               </a:defRPr>
             </a:pPr>
@@ -5138,7 +5327,7 @@
               </a:spcAft>
               <a:defRPr sz="1250">
                 <a:solidFill>
-                  <a:srgbClr val="8B96AD"/>
+                  <a:srgbClr val="A5828F"/>
                 </a:solidFill>
               </a:defRPr>
             </a:pPr>
@@ -5153,7 +5342,7 @@
               </a:spcAft>
               <a:defRPr sz="1250">
                 <a:solidFill>
-                  <a:srgbClr val="8B96AD"/>
+                  <a:srgbClr val="A5828F"/>
                 </a:solidFill>
               </a:defRPr>
             </a:pPr>
@@ -5192,7 +5381,7 @@
               </a:spcAft>
               <a:defRPr sz="1500">
                 <a:solidFill>
-                  <a:srgbClr val="E8ECF4"/>
+                  <a:srgbClr val="F7EDF1"/>
                 </a:solidFill>
               </a:defRPr>
             </a:pPr>
@@ -5207,7 +5396,7 @@
               </a:spcAft>
               <a:defRPr sz="1500">
                 <a:solidFill>
-                  <a:srgbClr val="2ECC8F"/>
+                  <a:srgbClr val="3ECF8E"/>
                 </a:solidFill>
               </a:defRPr>
             </a:pPr>
@@ -5246,7 +5435,7 @@
     <p:bg>
       <p:bgPr>
         <a:solidFill>
-          <a:srgbClr val="0A0E17"/>
+          <a:srgbClr val="14060B"/>
         </a:solidFill>
         <a:effectLst/>
       </p:bgPr>
@@ -5286,7 +5475,7 @@
               </a:spcAft>
               <a:defRPr sz="1300" b="1">
                 <a:solidFill>
-                  <a:srgbClr val="4F8CFF"/>
+                  <a:srgbClr val="F43F5E"/>
                 </a:solidFill>
               </a:defRPr>
             </a:pPr>
@@ -5301,74 +5490,36 @@
               </a:spcAft>
               <a:defRPr sz="3400" b="1">
                 <a:solidFill>
-                  <a:srgbClr val="E8ECF4"/>
-                </a:solidFill>
-              </a:defRPr>
-            </a:pPr>
-            <a:r>
-              <a:t>The misinformation trap — caught live</a:t>
-            </a:r>
-          </a:p>
-        </p:txBody>
-      </p:sp>
-      <p:sp>
-        <p:nvSpPr>
-          <p:cNvPr id="3" name="TextBox 2"/>
-          <p:cNvSpPr txBox="1"/>
+                  <a:srgbClr val="F7EDF1"/>
+                </a:solidFill>
+              </a:defRPr>
+            </a:pPr>
+            <a:r>
+              <a:t>Measured, not vibes — the eval harness</a:t>
+            </a:r>
+          </a:p>
+        </p:txBody>
+      </p:sp>
+      <p:sp>
+        <p:nvSpPr>
+          <p:cNvPr id="3" name="Rectangle 2"/>
+          <p:cNvSpPr/>
           <p:nvPr/>
         </p:nvSpPr>
         <p:spPr>
           <a:xfrm>
-            <a:off x="640080" y="1645920"/>
-            <a:ext cx="10972800" cy="1005840"/>
-          </a:xfrm>
-          <a:prstGeom prst="rect">
-            <a:avLst/>
-          </a:prstGeom>
-          <a:noFill/>
-        </p:spPr>
-        <p:txBody>
-          <a:bodyPr wrap="square">
-            <a:spAutoFit/>
-          </a:bodyPr>
-          <a:lstStyle/>
-          <a:p>
-            <a:pPr algn="l">
-              <a:spcAft>
-                <a:spcPts val="800"/>
-              </a:spcAft>
-              <a:defRPr sz="1700" b="1">
-                <a:solidFill>
-                  <a:srgbClr val="F5B942"/>
-                </a:solidFill>
-              </a:defRPr>
-            </a:pPr>
-            <a:r>
-              <a:t>Query: “Albert Einstein won the Nobel Prize for his theory of relativity”</a:t>
-            </a:r>
-          </a:p>
-        </p:txBody>
-      </p:sp>
-      <p:sp>
-        <p:nvSpPr>
-          <p:cNvPr id="4" name="Rectangle 3"/>
-          <p:cNvSpPr/>
-          <p:nvPr/>
-        </p:nvSpPr>
-        <p:spPr>
-          <a:xfrm>
-            <a:off x="548640" y="2743200"/>
-            <a:ext cx="5486400" cy="3291840"/>
+            <a:off x="548640" y="1737360"/>
+            <a:ext cx="5486400" cy="4206240"/>
           </a:xfrm>
           <a:prstGeom prst="rect">
             <a:avLst/>
           </a:prstGeom>
           <a:solidFill>
-            <a:srgbClr val="141B2D"/>
+            <a:srgbClr val="241019"/>
           </a:solidFill>
           <a:ln>
             <a:solidFill>
-              <a:srgbClr val="232E47"/>
+              <a:srgbClr val="4A2436"/>
             </a:solidFill>
           </a:ln>
         </p:spPr>
@@ -5396,141 +5547,198 @@
               </a:spcAft>
               <a:defRPr sz="1500" b="1">
                 <a:solidFill>
-                  <a:srgbClr val="FF5D6C"/>
-                </a:solidFill>
-              </a:defRPr>
-            </a:pPr>
-            <a:r>
-              <a:t>WHAT HAPPENED</a:t>
-            </a:r>
-          </a:p>
-          <a:p>
-            <a:pPr>
-              <a:spcAft>
-                <a:spcPts val="600"/>
-              </a:spcAft>
-              <a:defRPr sz="1250">
-                <a:solidFill>
-                  <a:srgbClr val="8B96AD"/>
-                </a:solidFill>
-              </a:defRPr>
-            </a:pPr>
-            <a:r>
-              <a:t>1. Murli formed 3 hypotheses + counter-searches</a:t>
-            </a:r>
-          </a:p>
-          <a:p>
-            <a:pPr>
-              <a:spcAft>
-                <a:spcPts val="600"/>
-              </a:spcAft>
-              <a:defRPr sz="1250">
-                <a:solidFill>
-                  <a:srgbClr val="8B96AD"/>
-                </a:solidFill>
-              </a:defRPr>
-            </a:pPr>
-            <a:r>
-              <a:t>2. Extractor surfaced the premise as Claim 1</a:t>
-            </a:r>
-          </a:p>
-          <a:p>
-            <a:pPr>
-              <a:spcAft>
-                <a:spcPts val="600"/>
-              </a:spcAft>
-              <a:defRPr sz="1250">
-                <a:solidFill>
-                  <a:srgbClr val="8B96AD"/>
-                </a:solidFill>
-              </a:defRPr>
-            </a:pPr>
-            <a:r>
-              <a:t>3. All three verifiers: A=refute B=refute C=refute</a:t>
-            </a:r>
-          </a:p>
-          <a:p>
-            <a:pPr>
-              <a:spcAft>
-                <a:spcPts val="600"/>
-              </a:spcAft>
-              <a:defRPr sz="1250">
-                <a:solidFill>
-                  <a:srgbClr val="8B96AD"/>
-                </a:solidFill>
-              </a:defRPr>
-            </a:pPr>
-            <a:r>
-              <a:t>4. Claim 1 → REFUTED with exact quotes from</a:t>
-            </a:r>
-          </a:p>
-          <a:p>
-            <a:pPr>
-              <a:spcAft>
-                <a:spcPts val="600"/>
-              </a:spcAft>
-              <a:defRPr sz="1250">
-                <a:solidFill>
-                  <a:srgbClr val="8B96AD"/>
-                </a:solidFill>
-              </a:defRPr>
-            </a:pPr>
-            <a:r>
-              <a:t>   nobelprize.org, span-validated + signed</a:t>
-            </a:r>
-          </a:p>
-          <a:p>
-            <a:pPr>
-              <a:spcAft>
-                <a:spcPts val="600"/>
-              </a:spcAft>
-              <a:defRPr sz="1250">
-                <a:solidFill>
-                  <a:srgbClr val="8B96AD"/>
-                </a:solidFill>
-              </a:defRPr>
-            </a:pPr>
-            <a:r>
-              <a:t>5. Report opens with the correction, not the myth</a:t>
-            </a:r>
-          </a:p>
-          <a:p>
-            <a:pPr>
-              <a:spcAft>
-                <a:spcPts val="600"/>
-              </a:spcAft>
-              <a:defRPr sz="1250">
-                <a:solidFill>
-                  <a:srgbClr val="8B96AD"/>
-                </a:solidFill>
-              </a:defRPr>
-            </a:pPr>
-            <a:r>
-              <a:t>6. Attestation: Merkle root ✓, all signatures ✓</a:t>
-            </a:r>
-          </a:p>
-        </p:txBody>
-      </p:sp>
-      <p:sp>
-        <p:nvSpPr>
-          <p:cNvPr id="5" name="Rectangle 4"/>
+                  <a:srgbClr val="3ECF8E"/>
+                </a:solidFill>
+              </a:defRPr>
+            </a:pPr>
+            <a:r>
+              <a:t>50-CLAIM LABELED HARNESS (CI-GATED)</a:t>
+            </a:r>
+          </a:p>
+          <a:p>
+            <a:pPr>
+              <a:spcAft>
+                <a:spcPts val="600"/>
+              </a:spcAft>
+              <a:defRPr sz="1250">
+                <a:solidFill>
+                  <a:srgbClr val="A5828F"/>
+                </a:solidFill>
+              </a:defRPr>
+            </a:pPr>
+            <a:r>
+              <a:t>Label accuracy: 100%  (target ≥75%)</a:t>
+            </a:r>
+          </a:p>
+          <a:p>
+            <a:pPr>
+              <a:spcAft>
+                <a:spcPts val="600"/>
+              </a:spcAft>
+              <a:defRPr sz="1250">
+                <a:solidFill>
+                  <a:srgbClr val="A5828F"/>
+                </a:solidFill>
+              </a:defRPr>
+            </a:pPr>
+            <a:r>
+              <a:t>Trap catch-rate:       100%  (target ≥90%)</a:t>
+            </a:r>
+          </a:p>
+          <a:p>
+            <a:pPr>
+              <a:spcAft>
+                <a:spcPts val="600"/>
+              </a:spcAft>
+              <a:defRPr sz="1250">
+                <a:solidFill>
+                  <a:srgbClr val="A5828F"/>
+                </a:solidFill>
+              </a:defRPr>
+            </a:pPr>
+            <a:r>
+              <a:t>False-alarm rate:        0%  (target ≤10%)</a:t>
+            </a:r>
+          </a:p>
+          <a:p>
+            <a:pPr>
+              <a:spcAft>
+                <a:spcPts val="600"/>
+              </a:spcAft>
+              <a:defRPr sz="1250">
+                <a:solidFill>
+                  <a:srgbClr val="A5828F"/>
+                </a:solidFill>
+              </a:defRPr>
+            </a:pPr>
+            <a:r>
+              <a:t>Error rate:              0%  (target ≤5%)</a:t>
+            </a:r>
+          </a:p>
+          <a:p>
+            <a:pPr>
+              <a:spcAft>
+                <a:spcPts val="600"/>
+              </a:spcAft>
+              <a:defRPr sz="1250">
+                <a:solidFill>
+                  <a:srgbClr val="A5828F"/>
+                </a:solidFill>
+              </a:defRPr>
+            </a:pPr>
+            <a:r>
+              <a:t>Calibration (ECE):    0.309  (measured + shown)</a:t>
+            </a:r>
+          </a:p>
+          <a:p>
+            <a:pPr>
+              <a:spcAft>
+                <a:spcPts val="600"/>
+              </a:spcAft>
+              <a:defRPr sz="1250">
+                <a:solidFill>
+                  <a:srgbClr val="A5828F"/>
+                </a:solidFill>
+              </a:defRPr>
+            </a:pPr>
+          </a:p>
+          <a:p>
+            <a:pPr>
+              <a:spcAft>
+                <a:spcPts val="600"/>
+              </a:spcAft>
+              <a:defRPr sz="1250">
+                <a:solidFill>
+                  <a:srgbClr val="A5828F"/>
+                </a:solidFill>
+              </a:defRPr>
+            </a:pPr>
+            <a:r>
+              <a:t>Einstein trap → premise REFUTED 3-0</a:t>
+            </a:r>
+          </a:p>
+          <a:p>
+            <a:pPr>
+              <a:spcAft>
+                <a:spcPts val="600"/>
+              </a:spcAft>
+              <a:defRPr sz="1250">
+                <a:solidFill>
+                  <a:srgbClr val="A5828F"/>
+                </a:solidFill>
+              </a:defRPr>
+            </a:pPr>
+            <a:r>
+              <a:t>Great Wall trap → 6 fabricated quotes</a:t>
+            </a:r>
+          </a:p>
+          <a:p>
+            <a:pPr>
+              <a:spcAft>
+                <a:spcPts val="600"/>
+              </a:spcAft>
+              <a:defRPr sz="1250">
+                <a:solidFill>
+                  <a:srgbClr val="A5828F"/>
+                </a:solidFill>
+              </a:defRPr>
+            </a:pPr>
+            <a:r>
+              <a:t>  caught and VOIDED by the span gate;</a:t>
+            </a:r>
+          </a:p>
+          <a:p>
+            <a:pPr>
+              <a:spcAft>
+                <a:spcPts val="600"/>
+              </a:spcAft>
+              <a:defRPr sz="1250">
+                <a:solidFill>
+                  <a:srgbClr val="A5828F"/>
+                </a:solidFill>
+              </a:defRPr>
+            </a:pPr>
+            <a:r>
+              <a:t>  premise still REFUTED</a:t>
+            </a:r>
+          </a:p>
+          <a:p>
+            <a:pPr>
+              <a:spcAft>
+                <a:spcPts val="600"/>
+              </a:spcAft>
+              <a:defRPr sz="1250">
+                <a:solidFill>
+                  <a:srgbClr val="A5828F"/>
+                </a:solidFill>
+              </a:defRPr>
+            </a:pPr>
+            <a:r>
+              <a:t>Clean topics → high trust, zero false alarms</a:t>
+            </a:r>
+          </a:p>
+        </p:txBody>
+      </p:sp>
+      <p:sp>
+        <p:nvSpPr>
+          <p:cNvPr id="4" name="Rectangle 3"/>
           <p:cNvSpPr/>
           <p:nvPr/>
         </p:nvSpPr>
         <p:spPr>
           <a:xfrm>
-            <a:off x="6309360" y="2743200"/>
-            <a:ext cx="5303520" cy="3291840"/>
+            <a:off x="6309360" y="1737360"/>
+            <a:ext cx="5303520" cy="4206240"/>
           </a:xfrm>
           <a:prstGeom prst="rect">
             <a:avLst/>
           </a:prstGeom>
           <a:solidFill>
-            <a:srgbClr val="141B2D"/>
+            <a:srgbClr val="241019"/>
           </a:solidFill>
           <a:ln>
             <a:solidFill>
-              <a:srgbClr val="232E47"/>
+              <a:srgbClr val="4A2436"/>
             </a:solidFill>
           </a:ln>
         </p:spPr>
@@ -5558,114 +5766,186 @@
               </a:spcAft>
               <a:defRPr sz="1500" b="1">
                 <a:solidFill>
-                  <a:srgbClr val="2ECC8F"/>
-                </a:solidFill>
-              </a:defRPr>
-            </a:pPr>
-            <a:r>
-              <a:t>WHY JUDGES SHOULD CARE</a:t>
-            </a:r>
-          </a:p>
-          <a:p>
-            <a:pPr>
-              <a:spcAft>
-                <a:spcPts val="600"/>
-              </a:spcAft>
-              <a:defRPr sz="1250">
-                <a:solidFill>
-                  <a:srgbClr val="8B96AD"/>
-                </a:solidFill>
-              </a:defRPr>
-            </a:pPr>
-            <a:r>
-              <a:t>A plain chatbot repeats the myth confidently.</a:t>
-            </a:r>
-          </a:p>
-          <a:p>
-            <a:pPr>
-              <a:spcAft>
-                <a:spcPts val="600"/>
-              </a:spcAft>
-              <a:defRPr sz="1250">
-                <a:solidFill>
-                  <a:srgbClr val="8B96AD"/>
-                </a:solidFill>
-              </a:defRPr>
-            </a:pPr>
-            <a:r>
-              <a:t>VeritasAI refutes it with verifiable receipts.</a:t>
-            </a:r>
-          </a:p>
-          <a:p>
-            <a:pPr>
-              <a:spcAft>
-                <a:spcPts val="600"/>
-              </a:spcAft>
-              <a:defRPr sz="1250">
-                <a:solidFill>
-                  <a:srgbClr val="8B96AD"/>
-                </a:solidFill>
-              </a:defRPr>
-            </a:pPr>
-          </a:p>
-          <a:p>
-            <a:pPr>
-              <a:spcAft>
-                <a:spcPts val="600"/>
-              </a:spcAft>
-              <a:defRPr sz="1250">
-                <a:solidFill>
-                  <a:srgbClr val="8B96AD"/>
-                </a:solidFill>
-              </a:defRPr>
-            </a:pPr>
-            <a:r>
-              <a:t>Measured: Great Wall trap → 6 fabricated</a:t>
-            </a:r>
-          </a:p>
-          <a:p>
-            <a:pPr>
-              <a:spcAft>
-                <a:spcPts val="600"/>
-              </a:spcAft>
-              <a:defRPr sz="1250">
-                <a:solidFill>
-                  <a:srgbClr val="8B96AD"/>
-                </a:solidFill>
-              </a:defRPr>
-            </a:pPr>
-            <a:r>
-              <a:t>verifier quotes caught and voided by the</a:t>
-            </a:r>
-          </a:p>
-          <a:p>
-            <a:pPr>
-              <a:spcAft>
-                <a:spcPts val="600"/>
-              </a:spcAft>
-              <a:defRPr sz="1250">
-                <a:solidFill>
-                  <a:srgbClr val="8B96AD"/>
-                </a:solidFill>
-              </a:defRPr>
-            </a:pPr>
-            <a:r>
-              <a:t>span gate; premise still REFUTED.</a:t>
-            </a:r>
-          </a:p>
-          <a:p>
-            <a:pPr>
-              <a:spcAft>
-                <a:spcPts val="600"/>
-              </a:spcAft>
-              <a:defRPr sz="1250">
-                <a:solidFill>
-                  <a:srgbClr val="8B96AD"/>
-                </a:solidFill>
-              </a:defRPr>
-            </a:pPr>
-            <a:r>
-              <a:t>Clean topics → high-trust, zero false alarms.</a:t>
+                  <a:srgbClr val="F43F5E"/>
+                </a:solidFill>
+              </a:defRPr>
+            </a:pPr>
+            <a:r>
+              <a:t>PHASE 3 — MEMORY</a:t>
+            </a:r>
+          </a:p>
+          <a:p>
+            <a:pPr>
+              <a:spcAft>
+                <a:spcPts val="600"/>
+              </a:spcAft>
+              <a:defRPr sz="1250">
+                <a:solidFill>
+                  <a:srgbClr val="A5828F"/>
+                </a:solidFill>
+              </a:defRPr>
+            </a:pPr>
+            <a:r>
+              <a:t>Re-run speedup:  56% faster (55s → 24s)</a:t>
+            </a:r>
+          </a:p>
+          <a:p>
+            <a:pPr>
+              <a:spcAft>
+                <a:spcPts val="600"/>
+              </a:spcAft>
+              <a:defRPr sz="1250">
+                <a:solidFill>
+                  <a:srgbClr val="A5828F"/>
+                </a:solidFill>
+              </a:defRPr>
+            </a:pPr>
+            <a:r>
+              <a:t>Claims reused from memory:  7/9</a:t>
+            </a:r>
+          </a:p>
+          <a:p>
+            <a:pPr>
+              <a:spcAft>
+                <a:spcPts val="600"/>
+              </a:spcAft>
+              <a:defRPr sz="1250">
+                <a:solidFill>
+                  <a:srgbClr val="A5828F"/>
+                </a:solidFill>
+              </a:defRPr>
+            </a:pPr>
+            <a:r>
+              <a:t>Priors recalled at intake:  6</a:t>
+            </a:r>
+          </a:p>
+          <a:p>
+            <a:pPr>
+              <a:spcAft>
+                <a:spcPts val="600"/>
+              </a:spcAft>
+              <a:defRPr sz="1250">
+                <a:solidFill>
+                  <a:srgbClr val="A5828F"/>
+                </a:solidFill>
+              </a:defRPr>
+            </a:pPr>
+          </a:p>
+          <a:p>
+            <a:pPr>
+              <a:spcAft>
+                <a:spcPts val="600"/>
+              </a:spcAft>
+              <a:defRPr sz="1250">
+                <a:solidFill>
+                  <a:srgbClr val="A5828F"/>
+                </a:solidFill>
+              </a:defRPr>
+            </a:pPr>
+            <a:r>
+              <a:t>PHASE 6 — SEMANTIC LAYER</a:t>
+            </a:r>
+          </a:p>
+          <a:p>
+            <a:pPr>
+              <a:spcAft>
+                <a:spcPts val="600"/>
+              </a:spcAft>
+              <a:defRPr sz="1250">
+                <a:solidFill>
+                  <a:srgbClr val="A5828F"/>
+                </a:solidFill>
+              </a:defRPr>
+            </a:pPr>
+            <a:r>
+              <a:t>Counter-evidence retrieval surfaces</a:t>
+            </a:r>
+          </a:p>
+          <a:p>
+            <a:pPr>
+              <a:spcAft>
+                <a:spcPts val="600"/>
+              </a:spcAft>
+              <a:defRPr sz="1250">
+                <a:solidFill>
+                  <a:srgbClr val="A5828F"/>
+                </a:solidFill>
+              </a:defRPr>
+            </a:pPr>
+            <a:r>
+              <a:t>opposing passages keyword search misses</a:t>
+            </a:r>
+          </a:p>
+          <a:p>
+            <a:pPr>
+              <a:spcAft>
+                <a:spcPts val="600"/>
+              </a:spcAft>
+              <a:defRPr sz="1250">
+                <a:solidFill>
+                  <a:srgbClr val="A5828F"/>
+                </a:solidFill>
+              </a:defRPr>
+            </a:pPr>
+            <a:r>
+              <a:t>(contrastive embedding score)</a:t>
+            </a:r>
+          </a:p>
+          <a:p>
+            <a:pPr>
+              <a:spcAft>
+                <a:spcPts val="600"/>
+              </a:spcAft>
+              <a:defRPr sz="1250">
+                <a:solidFill>
+                  <a:srgbClr val="A5828F"/>
+                </a:solidFill>
+              </a:defRPr>
+            </a:pPr>
+          </a:p>
+          <a:p>
+            <a:pPr>
+              <a:spcAft>
+                <a:spcPts val="600"/>
+              </a:spcAft>
+              <a:defRPr sz="1250">
+                <a:solidFill>
+                  <a:srgbClr val="A5828F"/>
+                </a:solidFill>
+              </a:defRPr>
+            </a:pPr>
+            <a:r>
+              <a:t>PHASE 7 — KNOWLEDGE GRAPH</a:t>
+            </a:r>
+          </a:p>
+          <a:p>
+            <a:pPr>
+              <a:spcAft>
+                <a:spcPts val="600"/>
+              </a:spcAft>
+              <a:defRPr sz="1250">
+                <a:solidFill>
+                  <a:srgbClr val="A5828F"/>
+                </a:solidFill>
+              </a:defRPr>
+            </a:pPr>
+            <a:r>
+              <a:t>Circular citations detected in the</a:t>
+            </a:r>
+          </a:p>
+          <a:p>
+            <a:pPr>
+              <a:spcAft>
+                <a:spcPts val="600"/>
+              </a:spcAft>
+              <a:defRPr sz="1250">
+                <a:solidFill>
+                  <a:srgbClr val="A5828F"/>
+                </a:solidFill>
+              </a:defRPr>
+            </a:pPr>
+            <a:r>
+              <a:t>provenance graph (blog-citing-blog)</a:t>
             </a:r>
           </a:p>
         </p:txBody>
@@ -5684,7 +5964,7 @@
     <p:bg>
       <p:bgPr>
         <a:solidFill>
-          <a:srgbClr val="0A0E17"/>
+          <a:srgbClr val="14060B"/>
         </a:solidFill>
         <a:effectLst/>
       </p:bgPr>
@@ -5724,12 +6004,12 @@
               </a:spcAft>
               <a:defRPr sz="1300" b="1">
                 <a:solidFill>
-                  <a:srgbClr val="4F8CFF"/>
-                </a:solidFill>
-              </a:defRPr>
-            </a:pPr>
-            <a:r>
-              <a:t>BUILD &amp; WHAT'S NEXT</a:t>
+                  <a:srgbClr val="F43F5E"/>
+                </a:solidFill>
+              </a:defRPr>
+            </a:pPr>
+            <a:r>
+              <a:t>LIVE DEMO</a:t>
             </a:r>
           </a:p>
           <a:p>
@@ -5739,12 +6019,265 @@
               </a:spcAft>
               <a:defRPr sz="3400" b="1">
                 <a:solidFill>
-                  <a:srgbClr val="E8ECF4"/>
-                </a:solidFill>
-              </a:defRPr>
-            </a:pPr>
-            <a:r>
-              <a:t>Phase 0-1 shipped · 18-month arc planned</a:t>
+                  <a:srgbClr val="F7EDF1"/>
+                </a:solidFill>
+              </a:defRPr>
+            </a:pPr>
+            <a:r>
+              <a:t>What the judges will see (3 minutes)</a:t>
+            </a:r>
+          </a:p>
+        </p:txBody>
+      </p:sp>
+      <p:sp>
+        <p:nvSpPr>
+          <p:cNvPr id="3" name="TextBox 2"/>
+          <p:cNvSpPr txBox="1"/>
+          <p:nvPr/>
+        </p:nvSpPr>
+        <p:spPr>
+          <a:xfrm>
+            <a:off x="640080" y="1645920"/>
+            <a:ext cx="10972800" cy="4572000"/>
+          </a:xfrm>
+          <a:prstGeom prst="rect">
+            <a:avLst/>
+          </a:prstGeom>
+          <a:noFill/>
+        </p:spPr>
+        <p:txBody>
+          <a:bodyPr wrap="none">
+            <a:spAutoFit/>
+          </a:bodyPr>
+          <a:lstStyle/>
+          <a:p/>
+          <a:p>
+            <a:pPr>
+              <a:spcAft>
+                <a:spcPts val="600"/>
+              </a:spcAft>
+              <a:defRPr sz="1600">
+                <a:solidFill>
+                  <a:srgbClr val="F7EDF1"/>
+                </a:solidFill>
+              </a:defRPr>
+            </a:pPr>
+            <a:r>
+              <a:t>1. Open the landing page — the court is already in session (live transcript).</a:t>
+            </a:r>
+          </a:p>
+          <a:p>
+            <a:pPr>
+              <a:spcAft>
+                <a:spcPts val="600"/>
+              </a:spcAft>
+              <a:defRPr sz="1600">
+                <a:solidFill>
+                  <a:srgbClr val="F5B942"/>
+                </a:solidFill>
+              </a:defRPr>
+            </a:pPr>
+            <a:r>
+              <a:t>2. Enter a trap: “The Great Wall of China is visible from space.”</a:t>
+            </a:r>
+          </a:p>
+          <a:p>
+            <a:pPr>
+              <a:spcAft>
+                <a:spcPts val="600"/>
+              </a:spcAft>
+              <a:defRPr sz="1600">
+                <a:solidFill>
+                  <a:srgbClr val="F7EDF1"/>
+                </a:solidFill>
+              </a:defRPr>
+            </a:pPr>
+            <a:r>
+              <a:t>3. Watch the terminal: Murli forms 3 hypotheses, issues counter-searches,</a:t>
+            </a:r>
+          </a:p>
+          <a:p>
+            <a:pPr>
+              <a:spcAft>
+                <a:spcPts val="600"/>
+              </a:spcAft>
+              <a:defRPr sz="1600">
+                <a:solidFill>
+                  <a:srgbClr val="F7EDF1"/>
+                </a:solidFill>
+              </a:defRPr>
+            </a:pPr>
+            <a:r>
+              <a:t>   publishes its own weaknesses. Evidence streams in, chunked and hashed.</a:t>
+            </a:r>
+          </a:p>
+          <a:p>
+            <a:pPr>
+              <a:spcAft>
+                <a:spcPts val="600"/>
+              </a:spcAft>
+              <a:defRPr sz="1600">
+                <a:solidFill>
+                  <a:srgbClr val="F7EDF1"/>
+                </a:solidFill>
+              </a:defRPr>
+            </a:pPr>
+            <a:r>
+              <a:t>4. The chat space: three verifiers argue. The Skeptic disputes. Quotes that</a:t>
+            </a:r>
+          </a:p>
+          <a:p>
+            <a:pPr>
+              <a:spcAft>
+                <a:spcPts val="600"/>
+              </a:spcAft>
+              <a:defRPr sz="1600">
+                <a:solidFill>
+                  <a:srgbClr val="FF6B6B"/>
+                </a:solidFill>
+              </a:defRPr>
+            </a:pPr>
+            <a:r>
+              <a:t>   don't exist in the corpus are VOIDED live — the span gate in action.</a:t>
+            </a:r>
+          </a:p>
+          <a:p>
+            <a:pPr>
+              <a:spcAft>
+                <a:spcPts val="600"/>
+              </a:spcAft>
+              <a:defRPr sz="1600">
+                <a:solidFill>
+                  <a:srgbClr val="F7EDF1"/>
+                </a:solidFill>
+              </a:defRPr>
+            </a:pPr>
+            <a:r>
+              <a:t>5. The verdict: premise REFUTED. Click a citation → Evidence Inspector shows</a:t>
+            </a:r>
+          </a:p>
+          <a:p>
+            <a:pPr>
+              <a:spcAft>
+                <a:spcPts val="600"/>
+              </a:spcAft>
+              <a:defRPr sz="1600">
+                <a:solidFill>
+                  <a:srgbClr val="3ECF8E"/>
+                </a:solidFill>
+              </a:defRPr>
+            </a:pPr>
+            <a:r>
+              <a:t>   the exact quote, the hash, the Merkle proof verified in-browser.</a:t>
+            </a:r>
+          </a:p>
+          <a:p>
+            <a:pPr>
+              <a:spcAft>
+                <a:spcPts val="600"/>
+              </a:spcAft>
+              <a:defRPr sz="1600">
+                <a:solidFill>
+                  <a:srgbClr val="F7EDF1"/>
+                </a:solidFill>
+              </a:defRPr>
+            </a:pPr>
+            <a:r>
+              <a:t>6. The argument tree shows the Toulmin structure + weakest link.</a:t>
+            </a:r>
+          </a:p>
+          <a:p>
+            <a:pPr>
+              <a:spcAft>
+                <a:spcPts val="600"/>
+              </a:spcAft>
+              <a:defRPr sz="1600">
+                <a:solidFill>
+                  <a:srgbClr val="FB7185"/>
+                </a:solidFill>
+              </a:defRPr>
+            </a:pPr>
+            <a:r>
+              <a:t>7. Re-run the same topic → 56% faster, priors recalled from memory.</a:t>
+            </a:r>
+          </a:p>
+        </p:txBody>
+      </p:sp>
+    </p:spTree>
+  </p:cSld>
+  <p:clrMapOvr>
+    <a:masterClrMapping/>
+  </p:clrMapOvr>
+</p:sld>
+</file>
+
+<file path=ppt/slides/slide8.xml><?xml version="1.0" encoding="utf-8"?>
+<p:sld xmlns:a="http://schemas.openxmlformats.org/drawingml/2006/main" xmlns:p="http://schemas.openxmlformats.org/presentationml/2006/main" xmlns:r="http://schemas.openxmlformats.org/officeDocument/2006/relationships">
+  <p:cSld>
+    <p:bg>
+      <p:bgPr>
+        <a:solidFill>
+          <a:srgbClr val="14060B"/>
+        </a:solidFill>
+        <a:effectLst/>
+      </p:bgPr>
+    </p:bg>
+    <p:spTree>
+      <p:nvGrpSpPr>
+        <p:cNvPr id="1" name=""/>
+        <p:cNvGrpSpPr/>
+        <p:nvPr/>
+      </p:nvGrpSpPr>
+      <p:grpSpPr/>
+      <p:sp>
+        <p:nvSpPr>
+          <p:cNvPr id="2" name="TextBox 1"/>
+          <p:cNvSpPr txBox="1"/>
+          <p:nvPr/>
+        </p:nvSpPr>
+        <p:spPr>
+          <a:xfrm>
+            <a:off x="640080" y="411480"/>
+            <a:ext cx="10972800" cy="1097280"/>
+          </a:xfrm>
+          <a:prstGeom prst="rect">
+            <a:avLst/>
+          </a:prstGeom>
+          <a:noFill/>
+        </p:spPr>
+        <p:txBody>
+          <a:bodyPr wrap="square">
+            <a:spAutoFit/>
+          </a:bodyPr>
+          <a:lstStyle/>
+          <a:p>
+            <a:pPr algn="l">
+              <a:spcAft>
+                <a:spcPts val="800"/>
+              </a:spcAft>
+              <a:defRPr sz="1300" b="1">
+                <a:solidFill>
+                  <a:srgbClr val="F43F5E"/>
+                </a:solidFill>
+              </a:defRPr>
+            </a:pPr>
+            <a:r>
+              <a:t>REAL-WORLD IMPACT</a:t>
+            </a:r>
+          </a:p>
+          <a:p>
+            <a:pPr algn="l">
+              <a:spcAft>
+                <a:spcPts val="0"/>
+              </a:spcAft>
+              <a:defRPr sz="3400" b="1">
+                <a:solidFill>
+                  <a:srgbClr val="F7EDF1"/>
+                </a:solidFill>
+              </a:defRPr>
+            </a:pPr>
+            <a:r>
+              <a:t>Who needs this, and how it scales</a:t>
             </a:r>
           </a:p>
         </p:txBody>
@@ -5764,11 +6297,11 @@
             <a:avLst/>
           </a:prstGeom>
           <a:solidFill>
-            <a:srgbClr val="141B2D"/>
+            <a:srgbClr val="241019"/>
           </a:solidFill>
           <a:ln>
             <a:solidFill>
-              <a:srgbClr val="232E47"/>
+              <a:srgbClr val="4A2436"/>
             </a:solidFill>
           </a:ln>
         </p:spPr>
@@ -5796,144 +6329,162 @@
               </a:spcAft>
               <a:defRPr sz="1500" b="1">
                 <a:solidFill>
-                  <a:srgbClr val="4F8CFF"/>
-                </a:solidFill>
-              </a:defRPr>
-            </a:pPr>
-            <a:r>
-              <a:t>TECH STACK (SHIPPED)</a:t>
-            </a:r>
-          </a:p>
-          <a:p>
-            <a:pPr>
-              <a:spcAft>
-                <a:spcPts val="600"/>
-              </a:spcAft>
-              <a:defRPr sz="1250">
-                <a:solidFill>
-                  <a:srgbClr val="8B96AD"/>
-                </a:solidFill>
-              </a:defRPr>
-            </a:pPr>
-            <a:r>
-              <a:t>Backend — FastAPI + asyncio, SSE streaming</a:t>
-            </a:r>
-          </a:p>
-          <a:p>
-            <a:pPr>
-              <a:spcAft>
-                <a:spcPts val="600"/>
-              </a:spcAft>
-              <a:defRPr sz="1250">
-                <a:solidFill>
-                  <a:srgbClr val="8B96AD"/>
-                </a:solidFill>
-              </a:defRPr>
-            </a:pPr>
-            <a:r>
-              <a:t>LLM — Qwen (DashScope, provider-agnostic layer)</a:t>
-            </a:r>
-          </a:p>
-          <a:p>
-            <a:pPr>
-              <a:spcAft>
-                <a:spcPts val="600"/>
-              </a:spcAft>
-              <a:defRPr sz="1250">
-                <a:solidFill>
-                  <a:srgbClr val="8B96AD"/>
-                </a:solidFill>
-              </a:defRPr>
-            </a:pPr>
-            <a:r>
-              <a:t>Search — Serper.dev (web + scholar + news)</a:t>
-            </a:r>
-          </a:p>
-          <a:p>
-            <a:pPr>
-              <a:spcAft>
-                <a:spcPts val="600"/>
-              </a:spcAft>
-              <a:defRPr sz="1250">
-                <a:solidFill>
-                  <a:srgbClr val="8B96AD"/>
-                </a:solidFill>
-              </a:defRPr>
-            </a:pPr>
-            <a:r>
-              <a:t>Extraction — Tavily /extract (full text)</a:t>
-            </a:r>
-          </a:p>
-          <a:p>
-            <a:pPr>
-              <a:spcAft>
-                <a:spcPts val="600"/>
-              </a:spcAft>
-              <a:defRPr sz="1250">
-                <a:solidFill>
-                  <a:srgbClr val="8B96AD"/>
-                </a:solidFill>
-              </a:defRPr>
-            </a:pPr>
-            <a:r>
-              <a:t>Storage — SQLite journal + re-attestation</a:t>
-            </a:r>
-          </a:p>
-          <a:p>
-            <a:pPr>
-              <a:spcAft>
-                <a:spcPts val="600"/>
-              </a:spcAft>
-              <a:defRPr sz="1250">
-                <a:solidFill>
-                  <a:srgbClr val="8B96AD"/>
-                </a:solidFill>
-              </a:defRPr>
-            </a:pPr>
-            <a:r>
-              <a:t>Frontend — vanilla JS + Web Crypto</a:t>
-            </a:r>
-          </a:p>
-          <a:p>
-            <a:pPr>
-              <a:spcAft>
-                <a:spcPts val="600"/>
-              </a:spcAft>
-              <a:defRPr sz="1250">
-                <a:solidFill>
-                  <a:srgbClr val="8B96AD"/>
-                </a:solidFill>
-              </a:defRPr>
-            </a:pPr>
-          </a:p>
-          <a:p>
-            <a:pPr>
-              <a:spcAft>
-                <a:spcPts val="600"/>
-              </a:spcAft>
-              <a:defRPr sz="1250">
-                <a:solidFill>
-                  <a:srgbClr val="8B96AD"/>
-                </a:solidFill>
-              </a:defRPr>
-            </a:pPr>
-            <a:r>
-              <a:t>~2,900 lines · 10-stage court · fully async</a:t>
-            </a:r>
-          </a:p>
-          <a:p>
-            <a:pPr>
-              <a:spcAft>
-                <a:spcPts val="600"/>
-              </a:spcAft>
-              <a:defRPr sz="1250">
-                <a:solidFill>
-                  <a:srgbClr val="8B96AD"/>
-                </a:solidFill>
-              </a:defRPr>
-            </a:pPr>
-            <a:r>
-              <a:t>Typical run: 60-90 seconds end-to-end</a:t>
+                  <a:srgbClr val="F43F5E"/>
+                </a:solidFill>
+              </a:defRPr>
+            </a:pPr>
+            <a:r>
+              <a:t>WHO NEEDS THIS</a:t>
+            </a:r>
+          </a:p>
+          <a:p>
+            <a:pPr>
+              <a:spcAft>
+                <a:spcPts val="600"/>
+              </a:spcAft>
+              <a:defRPr sz="1250">
+                <a:solidFill>
+                  <a:srgbClr val="A5828F"/>
+                </a:solidFill>
+              </a:defRPr>
+            </a:pPr>
+            <a:r>
+              <a:t>Journalists &amp; newsrooms — verify claims</a:t>
+            </a:r>
+          </a:p>
+          <a:p>
+            <a:pPr>
+              <a:spcAft>
+                <a:spcPts val="600"/>
+              </a:spcAft>
+              <a:defRPr sz="1250">
+                <a:solidFill>
+                  <a:srgbClr val="A5828F"/>
+                </a:solidFill>
+              </a:defRPr>
+            </a:pPr>
+            <a:r>
+              <a:t>  before publishing, with receipts</a:t>
+            </a:r>
+          </a:p>
+          <a:p>
+            <a:pPr>
+              <a:spcAft>
+                <a:spcPts val="600"/>
+              </a:spcAft>
+              <a:defRPr sz="1250">
+                <a:solidFill>
+                  <a:srgbClr val="A5828F"/>
+                </a:solidFill>
+              </a:defRPr>
+            </a:pPr>
+            <a:r>
+              <a:t>Researchers — literature-backed fact-checking</a:t>
+            </a:r>
+          </a:p>
+          <a:p>
+            <a:pPr>
+              <a:spcAft>
+                <a:spcPts val="600"/>
+              </a:spcAft>
+              <a:defRPr sz="1250">
+                <a:solidFill>
+                  <a:srgbClr val="A5828F"/>
+                </a:solidFill>
+              </a:defRPr>
+            </a:pPr>
+            <a:r>
+              <a:t>  with provenance tracking</a:t>
+            </a:r>
+          </a:p>
+          <a:p>
+            <a:pPr>
+              <a:spcAft>
+                <a:spcPts val="600"/>
+              </a:spcAft>
+              <a:defRPr sz="1250">
+                <a:solidFill>
+                  <a:srgbClr val="A5828F"/>
+                </a:solidFill>
+              </a:defRPr>
+            </a:pPr>
+            <a:r>
+              <a:t>Legal &amp; compliance — auditable verification</a:t>
+            </a:r>
+          </a:p>
+          <a:p>
+            <a:pPr>
+              <a:spcAft>
+                <a:spcPts val="600"/>
+              </a:spcAft>
+              <a:defRPr sz="1250">
+                <a:solidFill>
+                  <a:srgbClr val="A5828F"/>
+                </a:solidFill>
+              </a:defRPr>
+            </a:pPr>
+            <a:r>
+              <a:t>  trails (compliance mode: full reasoning)</a:t>
+            </a:r>
+          </a:p>
+          <a:p>
+            <a:pPr>
+              <a:spcAft>
+                <a:spcPts val="600"/>
+              </a:spcAft>
+              <a:defRPr sz="1250">
+                <a:solidFill>
+                  <a:srgbClr val="A5828F"/>
+                </a:solidFill>
+              </a:defRPr>
+            </a:pPr>
+            <a:r>
+              <a:t>Platforms — white-label API for content</a:t>
+            </a:r>
+          </a:p>
+          <a:p>
+            <a:pPr>
+              <a:spcAft>
+                <a:spcPts val="600"/>
+              </a:spcAft>
+              <a:defRPr sz="1250">
+                <a:solidFill>
+                  <a:srgbClr val="A5828F"/>
+                </a:solidFill>
+              </a:defRPr>
+            </a:pPr>
+            <a:r>
+              <a:t>  moderation at scale</a:t>
+            </a:r>
+          </a:p>
+          <a:p>
+            <a:pPr>
+              <a:spcAft>
+                <a:spcPts val="600"/>
+              </a:spcAft>
+              <a:defRPr sz="1250">
+                <a:solidFill>
+                  <a:srgbClr val="A5828F"/>
+                </a:solidFill>
+              </a:defRPr>
+            </a:pPr>
+            <a:r>
+              <a:t>Education — teach critical thinking with</a:t>
+            </a:r>
+          </a:p>
+          <a:p>
+            <a:pPr>
+              <a:spcAft>
+                <a:spcPts val="600"/>
+              </a:spcAft>
+              <a:defRPr sz="1250">
+                <a:solidFill>
+                  <a:srgbClr val="A5828F"/>
+                </a:solidFill>
+              </a:defRPr>
+            </a:pPr>
+            <a:r>
+              <a:t>  a system that shows its work</a:t>
             </a:r>
           </a:p>
         </p:txBody>
@@ -5953,11 +6504,11 @@
             <a:avLst/>
           </a:prstGeom>
           <a:solidFill>
-            <a:srgbClr val="141B2D"/>
+            <a:srgbClr val="241019"/>
           </a:solidFill>
           <a:ln>
             <a:solidFill>
-              <a:srgbClr val="232E47"/>
+              <a:srgbClr val="4A2436"/>
             </a:solidFill>
           </a:ln>
         </p:spPr>
@@ -5985,132 +6536,742 @@
               </a:spcAft>
               <a:defRPr sz="1500" b="1">
                 <a:solidFill>
-                  <a:srgbClr val="7C5CFF"/>
-                </a:solidFill>
-              </a:defRPr>
-            </a:pPr>
-            <a:r>
-              <a:t>ROADMAP (MASTER PLAN)</a:t>
-            </a:r>
-          </a:p>
-          <a:p>
-            <a:pPr>
-              <a:spcAft>
-                <a:spcPts val="600"/>
-              </a:spcAft>
-              <a:defRPr sz="1250">
-                <a:solidFill>
-                  <a:srgbClr val="8B96AD"/>
-                </a:solidFill>
-              </a:defRPr>
-            </a:pPr>
-            <a:r>
-              <a:t>P2 — Trust engine v2 + FEVER/SciFact eval</a:t>
-            </a:r>
-          </a:p>
-          <a:p>
-            <a:pPr>
-              <a:spcAft>
-                <a:spcPts val="600"/>
-              </a:spcAft>
-              <a:defRPr sz="1250">
-                <a:solidFill>
-                  <a:srgbClr val="8B96AD"/>
-                </a:solidFill>
-              </a:defRPr>
-            </a:pPr>
-            <a:r>
-              <a:t>       harness in CI (prove it scientifically)</a:t>
-            </a:r>
-          </a:p>
-          <a:p>
-            <a:pPr>
-              <a:spcAft>
-                <a:spcPts val="600"/>
-              </a:spcAft>
-              <a:defRPr sz="1250">
-                <a:solidFill>
-                  <a:srgbClr val="8B96AD"/>
-                </a:solidFill>
-              </a:defRPr>
-            </a:pPr>
-            <a:r>
-              <a:t>P3 — Claim memory + multi-turn debate rounds</a:t>
-            </a:r>
-          </a:p>
-          <a:p>
-            <a:pPr>
-              <a:spcAft>
-                <a:spcPts val="600"/>
-              </a:spcAft>
-              <a:defRPr sz="1250">
-                <a:solidFill>
-                  <a:srgbClr val="8B96AD"/>
-                </a:solidFill>
-              </a:defRPr>
-            </a:pPr>
-            <a:r>
-              <a:t>P4 — Argument trees + Debate Theater UI</a:t>
-            </a:r>
-          </a:p>
-          <a:p>
-            <a:pPr>
-              <a:spcAft>
-                <a:spcPts val="600"/>
-              </a:spcAft>
-              <a:defRPr sz="1250">
-                <a:solidFill>
-                  <a:srgbClr val="8B96AD"/>
-                </a:solidFill>
-              </a:defRPr>
-            </a:pPr>
-            <a:r>
-              <a:t>P5 — ChromaDB: counter-evidence retrieval</a:t>
-            </a:r>
-          </a:p>
-          <a:p>
-            <a:pPr>
-              <a:spcAft>
-                <a:spcPts val="600"/>
-              </a:spcAft>
-              <a:defRPr sz="1250">
-                <a:solidFill>
-                  <a:srgbClr val="8B96AD"/>
-                </a:solidFill>
-              </a:defRPr>
-            </a:pPr>
-            <a:r>
-              <a:t>P6 — Neo4j provenance graph + expert referee</a:t>
-            </a:r>
-          </a:p>
-          <a:p>
-            <a:pPr>
-              <a:spcAft>
-                <a:spcPts val="600"/>
-              </a:spcAft>
-              <a:defRPr sz="1250">
-                <a:solidFill>
-                  <a:srgbClr val="8B96AD"/>
-                </a:solidFill>
-              </a:defRPr>
-            </a:pPr>
-            <a:r>
-              <a:t>P7 — Temporal durable orchestration</a:t>
-            </a:r>
-          </a:p>
-          <a:p>
-            <a:pPr>
-              <a:spcAft>
-                <a:spcPts val="600"/>
-              </a:spcAft>
-              <a:defRPr sz="1250">
-                <a:solidFill>
-                  <a:srgbClr val="8B96AD"/>
-                </a:solidFill>
-              </a:defRPr>
-            </a:pPr>
-            <a:r>
-              <a:t>P8 — Red-team agent + white-label API</a:t>
+                  <a:srgbClr val="3ECF8E"/>
+                </a:solidFill>
+              </a:defRPr>
+            </a:pPr>
+            <a:r>
+              <a:t>BUSINESS MODEL (IMPLEMENTED)</a:t>
+            </a:r>
+          </a:p>
+          <a:p>
+            <a:pPr>
+              <a:spcAft>
+                <a:spcPts val="600"/>
+              </a:spcAft>
+              <a:defRPr sz="1250">
+                <a:solidFill>
+                  <a:srgbClr val="A5828F"/>
+                </a:solidFill>
+              </a:defRPr>
+            </a:pPr>
+            <a:r>
+              <a:t>Free / Pro ($49/mo) / Enterprise ($149/mo)</a:t>
+            </a:r>
+          </a:p>
+          <a:p>
+            <a:pPr>
+              <a:spcAft>
+                <a:spcPts val="600"/>
+              </a:spcAft>
+              <a:defRPr sz="1250">
+                <a:solidFill>
+                  <a:srgbClr val="A5828F"/>
+                </a:solidFill>
+              </a:defRPr>
+            </a:pPr>
+            <a:r>
+              <a:t>Multi-tenant: API keys, usage metering,</a:t>
+            </a:r>
+          </a:p>
+          <a:p>
+            <a:pPr>
+              <a:spcAft>
+                <a:spcPts val="600"/>
+              </a:spcAft>
+              <a:defRPr sz="1250">
+                <a:solidFill>
+                  <a:srgbClr val="A5828F"/>
+                </a:solidFill>
+              </a:defRPr>
+            </a:pPr>
+            <a:r>
+              <a:t>  plan-based daily limits</a:t>
+            </a:r>
+          </a:p>
+          <a:p>
+            <a:pPr>
+              <a:spcAft>
+                <a:spcPts val="600"/>
+              </a:spcAft>
+              <a:defRPr sz="1250">
+                <a:solidFill>
+                  <a:srgbClr val="A5828F"/>
+                </a:solidFill>
+              </a:defRPr>
+            </a:pPr>
+            <a:r>
+              <a:t>White-label API v1 with rate limiting</a:t>
+            </a:r>
+          </a:p>
+          <a:p>
+            <a:pPr>
+              <a:spcAft>
+                <a:spcPts val="600"/>
+              </a:spcAft>
+              <a:defRPr sz="1250">
+                <a:solidFill>
+                  <a:srgbClr val="A5828F"/>
+                </a:solidFill>
+              </a:defRPr>
+            </a:pPr>
+          </a:p>
+          <a:p>
+            <a:pPr>
+              <a:spcAft>
+                <a:spcPts val="600"/>
+              </a:spcAft>
+              <a:defRPr sz="1250">
+                <a:solidFill>
+                  <a:srgbClr val="A5828F"/>
+                </a:solidFill>
+              </a:defRPr>
+            </a:pPr>
+            <a:r>
+              <a:t>SCALE PATH</a:t>
+            </a:r>
+          </a:p>
+          <a:p>
+            <a:pPr>
+              <a:spcAft>
+                <a:spcPts val="600"/>
+              </a:spcAft>
+              <a:defRPr sz="1250">
+                <a:solidFill>
+                  <a:srgbClr val="A5828F"/>
+                </a:solidFill>
+              </a:defRPr>
+            </a:pPr>
+            <a:r>
+              <a:t>Async pipeline (semaphore-bounded LLM calls)</a:t>
+            </a:r>
+          </a:p>
+          <a:p>
+            <a:pPr>
+              <a:spcAft>
+                <a:spcPts val="600"/>
+              </a:spcAft>
+              <a:defRPr sz="1250">
+                <a:solidFill>
+                  <a:srgbClr val="A5828F"/>
+                </a:solidFill>
+              </a:defRPr>
+            </a:pPr>
+            <a:r>
+              <a:t>Workflow journal: retry / replay for</a:t>
+            </a:r>
+          </a:p>
+          <a:p>
+            <a:pPr>
+              <a:spcAft>
+                <a:spcPts val="600"/>
+              </a:spcAft>
+              <a:defRPr sz="1250">
+                <a:solidFill>
+                  <a:srgbClr val="A5828F"/>
+                </a:solidFill>
+              </a:defRPr>
+            </a:pPr>
+            <a:r>
+              <a:t>  long-running investigations</a:t>
+            </a:r>
+          </a:p>
+          <a:p>
+            <a:pPr>
+              <a:spcAft>
+                <a:spcPts val="600"/>
+              </a:spcAft>
+              <a:defRPr sz="1250">
+                <a:solidFill>
+                  <a:srgbClr val="A5828F"/>
+                </a:solidFill>
+              </a:defRPr>
+            </a:pPr>
+            <a:r>
+              <a:t>Prometheus metrics for observability</a:t>
+            </a:r>
+          </a:p>
+          <a:p>
+            <a:pPr>
+              <a:spcAft>
+                <a:spcPts val="600"/>
+              </a:spcAft>
+              <a:defRPr sz="1250">
+                <a:solidFill>
+                  <a:srgbClr val="A5828F"/>
+                </a:solidFill>
+              </a:defRPr>
+            </a:pPr>
+            <a:r>
+              <a:t>Docker + nginx edge → horizontal scaling</a:t>
+            </a:r>
+          </a:p>
+        </p:txBody>
+      </p:sp>
+    </p:spTree>
+  </p:cSld>
+  <p:clrMapOvr>
+    <a:masterClrMapping/>
+  </p:clrMapOvr>
+</p:sld>
+</file>
+
+<file path=ppt/slides/slide9.xml><?xml version="1.0" encoding="utf-8"?>
+<p:sld xmlns:a="http://schemas.openxmlformats.org/drawingml/2006/main" xmlns:p="http://schemas.openxmlformats.org/presentationml/2006/main" xmlns:r="http://schemas.openxmlformats.org/officeDocument/2006/relationships">
+  <p:cSld>
+    <p:bg>
+      <p:bgPr>
+        <a:solidFill>
+          <a:srgbClr val="14060B"/>
+        </a:solidFill>
+        <a:effectLst/>
+      </p:bgPr>
+    </p:bg>
+    <p:spTree>
+      <p:nvGrpSpPr>
+        <p:cNvPr id="1" name=""/>
+        <p:cNvGrpSpPr/>
+        <p:nvPr/>
+      </p:nvGrpSpPr>
+      <p:grpSpPr/>
+      <p:sp>
+        <p:nvSpPr>
+          <p:cNvPr id="2" name="TextBox 1"/>
+          <p:cNvSpPr txBox="1"/>
+          <p:nvPr/>
+        </p:nvSpPr>
+        <p:spPr>
+          <a:xfrm>
+            <a:off x="640080" y="411480"/>
+            <a:ext cx="10972800" cy="1097280"/>
+          </a:xfrm>
+          <a:prstGeom prst="rect">
+            <a:avLst/>
+          </a:prstGeom>
+          <a:noFill/>
+        </p:spPr>
+        <p:txBody>
+          <a:bodyPr wrap="square">
+            <a:spAutoFit/>
+          </a:bodyPr>
+          <a:lstStyle/>
+          <a:p>
+            <a:pPr algn="l">
+              <a:spcAft>
+                <a:spcPts val="800"/>
+              </a:spcAft>
+              <a:defRPr sz="1300" b="1">
+                <a:solidFill>
+                  <a:srgbClr val="F43F5E"/>
+                </a:solidFill>
+              </a:defRPr>
+            </a:pPr>
+            <a:r>
+              <a:t>BUILD</a:t>
+            </a:r>
+          </a:p>
+          <a:p>
+            <a:pPr algn="l">
+              <a:spcAft>
+                <a:spcPts val="0"/>
+              </a:spcAft>
+              <a:defRPr sz="3400" b="1">
+                <a:solidFill>
+                  <a:srgbClr val="F7EDF1"/>
+                </a:solidFill>
+              </a:defRPr>
+            </a:pPr>
+            <a:r>
+              <a:t>All 9 phases shipped — the full stack</a:t>
+            </a:r>
+          </a:p>
+        </p:txBody>
+      </p:sp>
+      <p:sp>
+        <p:nvSpPr>
+          <p:cNvPr id="3" name="Rectangle 2"/>
+          <p:cNvSpPr/>
+          <p:nvPr/>
+        </p:nvSpPr>
+        <p:spPr>
+          <a:xfrm>
+            <a:off x="548640" y="1737360"/>
+            <a:ext cx="5486400" cy="4206240"/>
+          </a:xfrm>
+          <a:prstGeom prst="rect">
+            <a:avLst/>
+          </a:prstGeom>
+          <a:solidFill>
+            <a:srgbClr val="241019"/>
+          </a:solidFill>
+          <a:ln>
+            <a:solidFill>
+              <a:srgbClr val="4A2436"/>
+            </a:solidFill>
+          </a:ln>
+        </p:spPr>
+        <p:style>
+          <a:lnRef idx="1">
+            <a:schemeClr val="accent1"/>
+          </a:lnRef>
+          <a:fillRef idx="3">
+            <a:schemeClr val="accent1"/>
+          </a:fillRef>
+          <a:effectRef idx="2">
+            <a:schemeClr val="accent1"/>
+          </a:effectRef>
+          <a:fontRef idx="minor">
+            <a:schemeClr val="lt1"/>
+          </a:fontRef>
+        </p:style>
+        <p:txBody>
+          <a:bodyPr rtlCol="0" anchor="ctr" wrap="square"/>
+          <a:lstStyle/>
+          <a:p>
+            <a:pPr algn="l">
+              <a:spcAft>
+                <a:spcPts val="800"/>
+              </a:spcAft>
+              <a:defRPr sz="1500" b="1">
+                <a:solidFill>
+                  <a:srgbClr val="F43F5E"/>
+                </a:solidFill>
+              </a:defRPr>
+            </a:pPr>
+            <a:r>
+              <a:t>TECH STACK</a:t>
+            </a:r>
+          </a:p>
+          <a:p>
+            <a:pPr>
+              <a:spcAft>
+                <a:spcPts val="600"/>
+              </a:spcAft>
+              <a:defRPr sz="1250">
+                <a:solidFill>
+                  <a:srgbClr val="A5828F"/>
+                </a:solidFill>
+              </a:defRPr>
+            </a:pPr>
+            <a:r>
+              <a:t>Frontend — React 18 + TypeScript + Vite</a:t>
+            </a:r>
+          </a:p>
+          <a:p>
+            <a:pPr>
+              <a:spcAft>
+                <a:spcPts val="600"/>
+              </a:spcAft>
+              <a:defRPr sz="1250">
+                <a:solidFill>
+                  <a:srgbClr val="A5828F"/>
+                </a:solidFill>
+              </a:defRPr>
+            </a:pPr>
+            <a:r>
+              <a:t>  Web Crypto (client-side Merkle verification)</a:t>
+            </a:r>
+          </a:p>
+          <a:p>
+            <a:pPr>
+              <a:spcAft>
+                <a:spcPts val="600"/>
+              </a:spcAft>
+              <a:defRPr sz="1250">
+                <a:solidFill>
+                  <a:srgbClr val="A5828F"/>
+                </a:solidFill>
+              </a:defRPr>
+            </a:pPr>
+            <a:r>
+              <a:t>Backend — FastAPI + asyncio, SSE streaming</a:t>
+            </a:r>
+          </a:p>
+          <a:p>
+            <a:pPr>
+              <a:spcAft>
+                <a:spcPts val="600"/>
+              </a:spcAft>
+              <a:defRPr sz="1250">
+                <a:solidFill>
+                  <a:srgbClr val="A5828F"/>
+                </a:solidFill>
+              </a:defRPr>
+            </a:pPr>
+            <a:r>
+              <a:t>LLM — Qwen 3.5-plus (DashScope),</a:t>
+            </a:r>
+          </a:p>
+          <a:p>
+            <a:pPr>
+              <a:spcAft>
+                <a:spcPts val="600"/>
+              </a:spcAft>
+              <a:defRPr sz="1250">
+                <a:solidFill>
+                  <a:srgbClr val="A5828F"/>
+                </a:solidFill>
+              </a:defRPr>
+            </a:pPr>
+            <a:r>
+              <a:t>  auto-fallback to qwen3.6-plus-2026-04-02</a:t>
+            </a:r>
+          </a:p>
+          <a:p>
+            <a:pPr>
+              <a:spcAft>
+                <a:spcPts val="600"/>
+              </a:spcAft>
+              <a:defRPr sz="1250">
+                <a:solidFill>
+                  <a:srgbClr val="A5828F"/>
+                </a:solidFill>
+              </a:defRPr>
+            </a:pPr>
+            <a:r>
+              <a:t>Search — Serper.dev (web + scholar + news)</a:t>
+            </a:r>
+          </a:p>
+          <a:p>
+            <a:pPr>
+              <a:spcAft>
+                <a:spcPts val="600"/>
+              </a:spcAft>
+              <a:defRPr sz="1250">
+                <a:solidFill>
+                  <a:srgbClr val="A5828F"/>
+                </a:solidFill>
+              </a:defRPr>
+            </a:pPr>
+            <a:r>
+              <a:t>Extraction — Tavily /extract (full text)</a:t>
+            </a:r>
+          </a:p>
+          <a:p>
+            <a:pPr>
+              <a:spcAft>
+                <a:spcPts val="600"/>
+              </a:spcAft>
+              <a:defRPr sz="1250">
+                <a:solidFill>
+                  <a:srgbClr val="A5828F"/>
+                </a:solidFill>
+              </a:defRPr>
+            </a:pPr>
+            <a:r>
+              <a:t>Semantic — ChromaDB + bge-small-en-v1.5</a:t>
+            </a:r>
+          </a:p>
+          <a:p>
+            <a:pPr>
+              <a:spcAft>
+                <a:spcPts val="600"/>
+              </a:spcAft>
+              <a:defRPr sz="1250">
+                <a:solidFill>
+                  <a:srgbClr val="A5828F"/>
+                </a:solidFill>
+              </a:defRPr>
+            </a:pPr>
+            <a:r>
+              <a:t>Graph — NetworkX (provenance + cycles)</a:t>
+            </a:r>
+          </a:p>
+          <a:p>
+            <a:pPr>
+              <a:spcAft>
+                <a:spcPts val="600"/>
+              </a:spcAft>
+              <a:defRPr sz="1250">
+                <a:solidFill>
+                  <a:srgbClr val="A5828F"/>
+                </a:solidFill>
+              </a:defRPr>
+            </a:pPr>
+            <a:r>
+              <a:t>Storage — SQLite (journal + memory + tenants</a:t>
+            </a:r>
+          </a:p>
+          <a:p>
+            <a:pPr>
+              <a:spcAft>
+                <a:spcPts val="600"/>
+              </a:spcAft>
+              <a:defRPr sz="1250">
+                <a:solidFill>
+                  <a:srgbClr val="A5828F"/>
+                </a:solidFill>
+              </a:defRPr>
+            </a:pPr>
+            <a:r>
+              <a:t>  + feedback + workflow)</a:t>
+            </a:r>
+          </a:p>
+          <a:p>
+            <a:pPr>
+              <a:spcAft>
+                <a:spcPts val="600"/>
+              </a:spcAft>
+              <a:defRPr sz="1250">
+                <a:solidFill>
+                  <a:srgbClr val="A5828F"/>
+                </a:solidFill>
+              </a:defRPr>
+            </a:pPr>
+            <a:r>
+              <a:t>Deploy — Docker (multi-stage) / Render</a:t>
+            </a:r>
+          </a:p>
+        </p:txBody>
+      </p:sp>
+      <p:sp>
+        <p:nvSpPr>
+          <p:cNvPr id="4" name="Rectangle 3"/>
+          <p:cNvSpPr/>
+          <p:nvPr/>
+        </p:nvSpPr>
+        <p:spPr>
+          <a:xfrm>
+            <a:off x="6309360" y="1737360"/>
+            <a:ext cx="5303520" cy="4206240"/>
+          </a:xfrm>
+          <a:prstGeom prst="rect">
+            <a:avLst/>
+          </a:prstGeom>
+          <a:solidFill>
+            <a:srgbClr val="241019"/>
+          </a:solidFill>
+          <a:ln>
+            <a:solidFill>
+              <a:srgbClr val="4A2436"/>
+            </a:solidFill>
+          </a:ln>
+        </p:spPr>
+        <p:style>
+          <a:lnRef idx="1">
+            <a:schemeClr val="accent1"/>
+          </a:lnRef>
+          <a:fillRef idx="3">
+            <a:schemeClr val="accent1"/>
+          </a:fillRef>
+          <a:effectRef idx="2">
+            <a:schemeClr val="accent1"/>
+          </a:effectRef>
+          <a:fontRef idx="minor">
+            <a:schemeClr val="lt1"/>
+          </a:fontRef>
+        </p:style>
+        <p:txBody>
+          <a:bodyPr rtlCol="0" anchor="ctr" wrap="square"/>
+          <a:lstStyle/>
+          <a:p>
+            <a:pPr algn="l">
+              <a:spcAft>
+                <a:spcPts val="800"/>
+              </a:spcAft>
+              <a:defRPr sz="1500" b="1">
+                <a:solidFill>
+                  <a:srgbClr val="FB7185"/>
+                </a:solidFill>
+              </a:defRPr>
+            </a:pPr>
+            <a:r>
+              <a:t>PHASES 0-9 (ALL IMPLEMENTED)</a:t>
+            </a:r>
+          </a:p>
+          <a:p>
+            <a:pPr>
+              <a:spcAft>
+                <a:spcPts val="600"/>
+              </a:spcAft>
+              <a:defRPr sz="1250">
+                <a:solidFill>
+                  <a:srgbClr val="A5828F"/>
+                </a:solidFill>
+              </a:defRPr>
+            </a:pPr>
+            <a:r>
+              <a:t>P0 — Foundation: Murli + evidence pipeline</a:t>
+            </a:r>
+          </a:p>
+          <a:p>
+            <a:pPr>
+              <a:spcAft>
+                <a:spcPts val="600"/>
+              </a:spcAft>
+              <a:defRPr sz="1250">
+                <a:solidFill>
+                  <a:srgbClr val="A5828F"/>
+                </a:solidFill>
+              </a:defRPr>
+            </a:pPr>
+            <a:r>
+              <a:t>P1 — Full Court: span gate + signed verdicts</a:t>
+            </a:r>
+          </a:p>
+          <a:p>
+            <a:pPr>
+              <a:spcAft>
+                <a:spcPts val="600"/>
+              </a:spcAft>
+              <a:defRPr sz="1250">
+                <a:solidFill>
+                  <a:srgbClr val="A5828F"/>
+                </a:solidFill>
+              </a:defRPr>
+            </a:pPr>
+            <a:r>
+              <a:t>P2 — Trust &amp; Eval: harness + ECE + authority v2</a:t>
+            </a:r>
+          </a:p>
+          <a:p>
+            <a:pPr>
+              <a:spcAft>
+                <a:spcPts val="600"/>
+              </a:spcAft>
+              <a:defRPr sz="1250">
+                <a:solidFill>
+                  <a:srgbClr val="A5828F"/>
+                </a:solidFill>
+              </a:defRPr>
+            </a:pPr>
+            <a:r>
+              <a:t>P3 — Memory &amp; Debate: FTS5 + multi-turn + Judge</a:t>
+            </a:r>
+          </a:p>
+          <a:p>
+            <a:pPr>
+              <a:spcAft>
+                <a:spcPts val="600"/>
+              </a:spcAft>
+              <a:defRPr sz="1250">
+                <a:solidFill>
+                  <a:srgbClr val="A5828F"/>
+                </a:solidFill>
+              </a:defRPr>
+            </a:pPr>
+            <a:r>
+              <a:t>P4 — React Frontend: landing + chat + terminal</a:t>
+            </a:r>
+          </a:p>
+          <a:p>
+            <a:pPr>
+              <a:spcAft>
+                <a:spcPts val="600"/>
+              </a:spcAft>
+              <a:defRPr sz="1250">
+                <a:solidFill>
+                  <a:srgbClr val="A5828F"/>
+                </a:solidFill>
+              </a:defRPr>
+            </a:pPr>
+            <a:r>
+              <a:t>P5 — Argument Trees: Toulmin + radar + analytics</a:t>
+            </a:r>
+          </a:p>
+          <a:p>
+            <a:pPr>
+              <a:spcAft>
+                <a:spcPts val="600"/>
+              </a:spcAft>
+              <a:defRPr sz="1250">
+                <a:solidFill>
+                  <a:srgbClr val="A5828F"/>
+                </a:solidFill>
+              </a:defRPr>
+            </a:pPr>
+            <a:r>
+              <a:t>P6 — Semantic: ChromaDB counter-evidence + dedup</a:t>
+            </a:r>
+          </a:p>
+          <a:p>
+            <a:pPr>
+              <a:spcAft>
+                <a:spcPts val="600"/>
+              </a:spcAft>
+              <a:defRPr sz="1250">
+                <a:solidFill>
+                  <a:srgbClr val="A5828F"/>
+                </a:solidFill>
+              </a:defRPr>
+            </a:pPr>
+            <a:r>
+              <a:t>P7 — Knowledge Graph: provenance + circular</a:t>
+            </a:r>
+          </a:p>
+          <a:p>
+            <a:pPr>
+              <a:spcAft>
+                <a:spcPts val="600"/>
+              </a:spcAft>
+              <a:defRPr sz="1250">
+                <a:solidFill>
+                  <a:srgbClr val="A5828F"/>
+                </a:solidFill>
+              </a:defRPr>
+            </a:pPr>
+            <a:r>
+              <a:t> citations + Expert Referee + API v1</a:t>
+            </a:r>
+          </a:p>
+          <a:p>
+            <a:pPr>
+              <a:spcAft>
+                <a:spcPts val="600"/>
+              </a:spcAft>
+              <a:defRPr sz="1250">
+                <a:solidFill>
+                  <a:srgbClr val="A5828F"/>
+                </a:solidFill>
+              </a:defRPr>
+            </a:pPr>
+            <a:r>
+              <a:t>P8 — Durable Scale: workflow replay + metrics</a:t>
+            </a:r>
+          </a:p>
+          <a:p>
+            <a:pPr>
+              <a:spcAft>
+                <a:spcPts val="600"/>
+              </a:spcAft>
+              <a:defRPr sz="1250">
+                <a:solidFill>
+                  <a:srgbClr val="A5828F"/>
+                </a:solidFill>
+              </a:defRPr>
+            </a:pPr>
+            <a:r>
+              <a:t>      + compliance mode + Sentry</a:t>
+            </a:r>
+          </a:p>
+          <a:p>
+            <a:pPr>
+              <a:spcAft>
+                <a:spcPts val="600"/>
+              </a:spcAft>
+              <a:defRPr sz="1250">
+                <a:solidFill>
+                  <a:srgbClr val="A5828F"/>
+                </a:solidFill>
+              </a:defRPr>
+            </a:pPr>
+            <a:r>
+              <a:t>P9 — Enterprise: Red-Team + multi-tenant SaaS</a:t>
+            </a:r>
+          </a:p>
+          <a:p>
+            <a:pPr>
+              <a:spcAft>
+                <a:spcPts val="600"/>
+              </a:spcAft>
+              <a:defRPr sz="1250">
+                <a:solidFill>
+                  <a:srgbClr val="A5828F"/>
+                </a:solidFill>
+              </a:defRPr>
+            </a:pPr>
+            <a:r>
+              <a:t>      + RLHF-style feedback loop</a:t>
             </a:r>
           </a:p>
         </p:txBody>
